--- a/public/lessons/year-6-maths/spring/week-13/solve-fraction-multiplication-problems/teaching-powerpoint-v1.pptx
+++ b/public/lessons/year-6-maths/spring/week-13/solve-fraction-multiplication-problems/teaching-powerpoint-v1.pptx
@@ -2,24 +2,24 @@
 <file path=ppt/presentation.xml><?xml version="1.0" encoding="utf-8"?>
 <p:presentation xmlns:p="http://schemas.openxmlformats.org/presentationml/2006/main">
   <p:sldMasterIdLst>
-    <p:sldMasterId xmlns:r="http://schemas.openxmlformats.org/officeDocument/2006/relationships" id="2147483648" r:id="R07010515e91e428a"/>
+    <p:sldMasterId xmlns:r="http://schemas.openxmlformats.org/officeDocument/2006/relationships" id="2147483648" r:id="Raaad304a707e4d67"/>
   </p:sldMasterIdLst>
   <p:notesMasterIdLst>
-    <p:notesMasterId xmlns:r="http://schemas.openxmlformats.org/officeDocument/2006/relationships" r:id="R8eb1c95dd5024c72"/>
+    <p:notesMasterId xmlns:r="http://schemas.openxmlformats.org/officeDocument/2006/relationships" r:id="Rac6b7edaadd14a2a"/>
   </p:notesMasterIdLst>
   <p:sldIdLst>
-    <p:sldId xmlns:r="http://schemas.openxmlformats.org/officeDocument/2006/relationships" id="256" r:id="R1b0b95b4859a4422"/>
-    <p:sldId xmlns:r="http://schemas.openxmlformats.org/officeDocument/2006/relationships" id="257" r:id="R948290f50d1e43db"/>
-    <p:sldId xmlns:r="http://schemas.openxmlformats.org/officeDocument/2006/relationships" id="258" r:id="R6f64dd66ec5a4537"/>
-    <p:sldId xmlns:r="http://schemas.openxmlformats.org/officeDocument/2006/relationships" id="259" r:id="Rd71e62ad533e431e"/>
-    <p:sldId xmlns:r="http://schemas.openxmlformats.org/officeDocument/2006/relationships" id="260" r:id="Rbe046e6562964aaf"/>
-    <p:sldId xmlns:r="http://schemas.openxmlformats.org/officeDocument/2006/relationships" id="261" r:id="R107ed21b6f124607"/>
-    <p:sldId xmlns:r="http://schemas.openxmlformats.org/officeDocument/2006/relationships" id="262" r:id="Rdf5856eb5fa54665"/>
-    <p:sldId xmlns:r="http://schemas.openxmlformats.org/officeDocument/2006/relationships" id="263" r:id="R3bd6dfa8b2784aef"/>
-    <p:sldId xmlns:r="http://schemas.openxmlformats.org/officeDocument/2006/relationships" id="264" r:id="Rfb990954e822412a"/>
-    <p:sldId xmlns:r="http://schemas.openxmlformats.org/officeDocument/2006/relationships" id="265" r:id="Rb617f1a889ff48ab"/>
-    <p:sldId xmlns:r="http://schemas.openxmlformats.org/officeDocument/2006/relationships" id="266" r:id="R6b33ddce71fe43a7"/>
-    <p:sldId xmlns:r="http://schemas.openxmlformats.org/officeDocument/2006/relationships" id="267" r:id="R29a289a6158d4329"/>
+    <p:sldId xmlns:r="http://schemas.openxmlformats.org/officeDocument/2006/relationships" id="256" r:id="R439ea208dc6d4ef0"/>
+    <p:sldId xmlns:r="http://schemas.openxmlformats.org/officeDocument/2006/relationships" id="257" r:id="R1860965d9d354b37"/>
+    <p:sldId xmlns:r="http://schemas.openxmlformats.org/officeDocument/2006/relationships" id="258" r:id="R3b97aa18252b4686"/>
+    <p:sldId xmlns:r="http://schemas.openxmlformats.org/officeDocument/2006/relationships" id="259" r:id="R94642ed04a1845f3"/>
+    <p:sldId xmlns:r="http://schemas.openxmlformats.org/officeDocument/2006/relationships" id="260" r:id="Rf4da5f40559c4436"/>
+    <p:sldId xmlns:r="http://schemas.openxmlformats.org/officeDocument/2006/relationships" id="261" r:id="R6ac03419555c4290"/>
+    <p:sldId xmlns:r="http://schemas.openxmlformats.org/officeDocument/2006/relationships" id="262" r:id="Rb2192d094f0045f8"/>
+    <p:sldId xmlns:r="http://schemas.openxmlformats.org/officeDocument/2006/relationships" id="263" r:id="Rdaabe6b9ce404d4a"/>
+    <p:sldId xmlns:r="http://schemas.openxmlformats.org/officeDocument/2006/relationships" id="264" r:id="Ree04d522c9bb4ef2"/>
+    <p:sldId xmlns:r="http://schemas.openxmlformats.org/officeDocument/2006/relationships" id="265" r:id="Ree0eaca2b17541ba"/>
+    <p:sldId xmlns:r="http://schemas.openxmlformats.org/officeDocument/2006/relationships" id="266" r:id="R58d45616a911441e"/>
+    <p:sldId xmlns:r="http://schemas.openxmlformats.org/officeDocument/2006/relationships" id="267" r:id="Ra51512722ed84657"/>
   </p:sldIdLst>
   <p:sldSz cx="12192000" cy="6858000"/>
   <p:notesSz cx="6858000" cy="9144000"/>
@@ -873,7 +873,7 @@
           <a:lstStyle xmlns:a="http://schemas.openxmlformats.org/drawingml/2006/main"/>
           <a:p xmlns:a="http://schemas.openxmlformats.org/drawingml/2006/main">
             <a:r>
-              <a:t>I do. Reveal the question, setup and each calculation stage one click at a time. Pupils watch before copying. Model answer: 2/5 m.</a:t>
+              <a:t>I do. Reveal the question, then reveal each mathematical change one click at a time. Point to the numbers and operation that changed before moving to the next line. Final answer: 2/5 m.</a:t>
             </a:r>
           </a:p>
         </p:txBody>
@@ -1291,7 +1291,7 @@
   </p:cSld>
   <p:clrMap bg1="lt1" tx1="dk1" bg2="lt2" tx2="dk2" accent1="accent1" accent2="accent2" accent3="accent3" accent4="accent4" accent5="accent5" accent6="accent6" hlink="hlink" folHlink="folHlink"/>
   <p:sldLayoutIdLst>
-    <p:sldLayoutId xmlns:r="http://schemas.openxmlformats.org/officeDocument/2006/relationships" id="2147483649" r:id="R837f79279e3b4fd4"/>
+    <p:sldLayoutId xmlns:r="http://schemas.openxmlformats.org/officeDocument/2006/relationships" id="2147483649" r:id="R7a1655b7e7ab475d"/>
   </p:sldLayoutIdLst>
   <p:txStyles>
     <p:titleStyle>
@@ -1842,7 +1842,7 @@
           <p:cNvPr id="12" name="">
             <a:extLst xmlns:a="http://schemas.openxmlformats.org/drawingml/2006/main">
               <a:ext uri="{FF2B5EF4-FFF2-40B4-BE49-F238E27FC236}">
-                <a16:creationId xmlns:a16="http://schemas.microsoft.com/office/drawing/2014/main" id="{00B01F9A-0C2C-4B5B-AAFA-DF3EF19401C2}"/>
+                <a16:creationId xmlns:a16="http://schemas.microsoft.com/office/drawing/2014/main" id="{C48B40EC-C7B1-47F8-AFCE-4929BAD9093D}"/>
               </a:ext>
             </a:extLst>
           </p:cNvPr>
@@ -1874,7 +1874,7 @@
           <p:cNvPr id="2" name="">
             <a:extLst xmlns:a="http://schemas.openxmlformats.org/drawingml/2006/main">
               <a:ext uri="{FF2B5EF4-FFF2-40B4-BE49-F238E27FC236}">
-                <a16:creationId xmlns:a16="http://schemas.microsoft.com/office/drawing/2014/main" id="{5DBB9B05-724E-4F01-A465-D8686DD56FBD}"/>
+                <a16:creationId xmlns:a16="http://schemas.microsoft.com/office/drawing/2014/main" id="{13929697-DF44-4D26-B727-1F6F51C367D0}"/>
               </a:ext>
             </a:extLst>
           </p:cNvPr>
@@ -1931,7 +1931,7 @@
           <p:cNvPr id="3" name="">
             <a:extLst xmlns:a="http://schemas.openxmlformats.org/drawingml/2006/main">
               <a:ext uri="{FF2B5EF4-FFF2-40B4-BE49-F238E27FC236}">
-                <a16:creationId xmlns:a16="http://schemas.microsoft.com/office/drawing/2014/main" id="{D82DB447-1A01-41AB-AD6B-9A2DE7F58EC5}"/>
+                <a16:creationId xmlns:a16="http://schemas.microsoft.com/office/drawing/2014/main" id="{0A304EA1-4637-4E1B-A982-0BDE7404186B}"/>
               </a:ext>
             </a:extLst>
           </p:cNvPr>
@@ -1965,7 +1965,7 @@
           <p:cNvPr id="4" name="">
             <a:extLst xmlns:a="http://schemas.openxmlformats.org/drawingml/2006/main">
               <a:ext uri="{FF2B5EF4-FFF2-40B4-BE49-F238E27FC236}">
-                <a16:creationId xmlns:a16="http://schemas.microsoft.com/office/drawing/2014/main" id="{B06BBA7F-EE76-4387-B6E3-562F759AB8BB}"/>
+                <a16:creationId xmlns:a16="http://schemas.microsoft.com/office/drawing/2014/main" id="{3AFE629C-8F53-4800-9710-AA0A75337DEB}"/>
               </a:ext>
             </a:extLst>
           </p:cNvPr>
@@ -2022,7 +2022,7 @@
           <p:cNvPr id="5" name="">
             <a:extLst xmlns:a="http://schemas.openxmlformats.org/drawingml/2006/main">
               <a:ext uri="{FF2B5EF4-FFF2-40B4-BE49-F238E27FC236}">
-                <a16:creationId xmlns:a16="http://schemas.microsoft.com/office/drawing/2014/main" id="{427989FA-BCF3-4497-BB81-20AA9F507890}"/>
+                <a16:creationId xmlns:a16="http://schemas.microsoft.com/office/drawing/2014/main" id="{7BC32AB8-A80D-4C6A-95F6-CC966F18F576}"/>
               </a:ext>
             </a:extLst>
           </p:cNvPr>
@@ -2079,7 +2079,7 @@
           <p:cNvPr id="6" name="">
             <a:extLst xmlns:a="http://schemas.openxmlformats.org/drawingml/2006/main">
               <a:ext uri="{FF2B5EF4-FFF2-40B4-BE49-F238E27FC236}">
-                <a16:creationId xmlns:a16="http://schemas.microsoft.com/office/drawing/2014/main" id="{B336EAD0-19E6-41AF-AE95-7132A4DACA0A}"/>
+                <a16:creationId xmlns:a16="http://schemas.microsoft.com/office/drawing/2014/main" id="{6A5BD142-AFFD-4182-8BB9-74B7AA60B1DA}"/>
               </a:ext>
             </a:extLst>
           </p:cNvPr>
@@ -2113,7 +2113,7 @@
           <p:cNvPr id="7" name="">
             <a:extLst xmlns:a="http://schemas.openxmlformats.org/drawingml/2006/main">
               <a:ext uri="{FF2B5EF4-FFF2-40B4-BE49-F238E27FC236}">
-                <a16:creationId xmlns:a16="http://schemas.microsoft.com/office/drawing/2014/main" id="{DDD057AF-9AB8-469A-8A9F-BF14B5D76457}"/>
+                <a16:creationId xmlns:a16="http://schemas.microsoft.com/office/drawing/2014/main" id="{9CDAF79C-0709-4EB7-B926-0A9B09318340}"/>
               </a:ext>
             </a:extLst>
           </p:cNvPr>
@@ -2170,7 +2170,7 @@
           <p:cNvPr id="8" name="">
             <a:extLst xmlns:a="http://schemas.openxmlformats.org/drawingml/2006/main">
               <a:ext uri="{FF2B5EF4-FFF2-40B4-BE49-F238E27FC236}">
-                <a16:creationId xmlns:a16="http://schemas.microsoft.com/office/drawing/2014/main" id="{C20F8B68-BD33-4A0E-8CF8-2C0E4DF01B3C}"/>
+                <a16:creationId xmlns:a16="http://schemas.microsoft.com/office/drawing/2014/main" id="{F59D9EA7-4F75-4919-971F-923E84CB64AD}"/>
               </a:ext>
             </a:extLst>
           </p:cNvPr>
@@ -2227,7 +2227,7 @@
           <p:cNvPr id="9" name="">
             <a:extLst xmlns:a="http://schemas.openxmlformats.org/drawingml/2006/main">
               <a:ext uri="{FF2B5EF4-FFF2-40B4-BE49-F238E27FC236}">
-                <a16:creationId xmlns:a16="http://schemas.microsoft.com/office/drawing/2014/main" id="{2871641F-4B86-447A-A128-9341C25E800E}"/>
+                <a16:creationId xmlns:a16="http://schemas.microsoft.com/office/drawing/2014/main" id="{18B3DE8F-E48D-48CE-8599-C05F6DB82FEF}"/>
               </a:ext>
             </a:extLst>
           </p:cNvPr>
@@ -2284,7 +2284,7 @@
           <p:cNvPr id="10" name="">
             <a:extLst xmlns:a="http://schemas.openxmlformats.org/drawingml/2006/main">
               <a:ext uri="{FF2B5EF4-FFF2-40B4-BE49-F238E27FC236}">
-                <a16:creationId xmlns:a16="http://schemas.microsoft.com/office/drawing/2014/main" id="{BFAA2B4B-7B81-4BFC-8BDF-FC82A5460DDF}"/>
+                <a16:creationId xmlns:a16="http://schemas.microsoft.com/office/drawing/2014/main" id="{4B8540D2-8F01-44B9-BE0C-100AACAE4607}"/>
               </a:ext>
             </a:extLst>
           </p:cNvPr>
@@ -2341,7 +2341,7 @@
           <p:cNvPr id="11" name="">
             <a:extLst xmlns:a="http://schemas.openxmlformats.org/drawingml/2006/main">
               <a:ext uri="{FF2B5EF4-FFF2-40B4-BE49-F238E27FC236}">
-                <a16:creationId xmlns:a16="http://schemas.microsoft.com/office/drawing/2014/main" id="{E44E6143-2BA9-477B-836E-07497F8AD76F}"/>
+                <a16:creationId xmlns:a16="http://schemas.microsoft.com/office/drawing/2014/main" id="{47088F96-D626-4935-B60F-A028E835DD9D}"/>
               </a:ext>
             </a:extLst>
           </p:cNvPr>
@@ -2396,7 +2396,7 @@
     </p:spTree>
     <p:extLst>
       <p:ext uri="{BB962C8B-B14F-4D97-AF65-F5344CB8AC3E}">
-        <p14:creationId xmlns:p14="http://schemas.microsoft.com/office/powerpoint/2010/main" val="191737071"/>
+        <p14:creationId xmlns:p14="http://schemas.microsoft.com/office/powerpoint/2010/main" val="1106800840"/>
       </p:ext>
     </p:extLst>
   </p:cSld>
@@ -2427,7 +2427,7 @@
           <p:cNvPr id="14" name="">
             <a:extLst xmlns:a="http://schemas.openxmlformats.org/drawingml/2006/main">
               <a:ext uri="{FF2B5EF4-FFF2-40B4-BE49-F238E27FC236}">
-                <a16:creationId xmlns:a16="http://schemas.microsoft.com/office/drawing/2014/main" id="{03AFC9A9-AE10-4828-953C-B6778158173B}"/>
+                <a16:creationId xmlns:a16="http://schemas.microsoft.com/office/drawing/2014/main" id="{3BFFD0FE-3E9B-4D92-A40A-8D957A2138B8}"/>
               </a:ext>
             </a:extLst>
           </p:cNvPr>
@@ -2459,7 +2459,7 @@
           <p:cNvPr id="2" name="">
             <a:extLst xmlns:a="http://schemas.openxmlformats.org/drawingml/2006/main">
               <a:ext uri="{FF2B5EF4-FFF2-40B4-BE49-F238E27FC236}">
-                <a16:creationId xmlns:a16="http://schemas.microsoft.com/office/drawing/2014/main" id="{835E9A1E-886F-4369-A4C7-F921E840B91C}"/>
+                <a16:creationId xmlns:a16="http://schemas.microsoft.com/office/drawing/2014/main" id="{6A236E53-6CD2-410D-A07A-288826AEBBC0}"/>
               </a:ext>
             </a:extLst>
           </p:cNvPr>
@@ -2516,7 +2516,7 @@
           <p:cNvPr id="3" name="">
             <a:extLst xmlns:a="http://schemas.openxmlformats.org/drawingml/2006/main">
               <a:ext uri="{FF2B5EF4-FFF2-40B4-BE49-F238E27FC236}">
-                <a16:creationId xmlns:a16="http://schemas.microsoft.com/office/drawing/2014/main" id="{0D9B76FD-16A8-4A81-AC65-55EBEEAF93E3}"/>
+                <a16:creationId xmlns:a16="http://schemas.microsoft.com/office/drawing/2014/main" id="{3BB3ABBB-9C20-4622-BF57-FF2A55532841}"/>
               </a:ext>
             </a:extLst>
           </p:cNvPr>
@@ -2548,7 +2548,7 @@
           <p:cNvPr id="4" name="">
             <a:extLst xmlns:a="http://schemas.openxmlformats.org/drawingml/2006/main">
               <a:ext uri="{FF2B5EF4-FFF2-40B4-BE49-F238E27FC236}">
-                <a16:creationId xmlns:a16="http://schemas.microsoft.com/office/drawing/2014/main" id="{E2ADD823-A0D5-4585-997C-27B6A99163CC}"/>
+                <a16:creationId xmlns:a16="http://schemas.microsoft.com/office/drawing/2014/main" id="{A701A8FD-CB1C-4FD4-AE1E-E8EAFFE4281E}"/>
               </a:ext>
             </a:extLst>
           </p:cNvPr>
@@ -2605,7 +2605,7 @@
           <p:cNvPr id="5" name="">
             <a:extLst xmlns:a="http://schemas.openxmlformats.org/drawingml/2006/main">
               <a:ext uri="{FF2B5EF4-FFF2-40B4-BE49-F238E27FC236}">
-                <a16:creationId xmlns:a16="http://schemas.microsoft.com/office/drawing/2014/main" id="{F552EB64-64E9-4CA7-8BE0-F030F2EFF942}"/>
+                <a16:creationId xmlns:a16="http://schemas.microsoft.com/office/drawing/2014/main" id="{8C6AF92D-48AD-4623-A39C-0FA1F1C7A71F}"/>
               </a:ext>
             </a:extLst>
           </p:cNvPr>
@@ -2662,7 +2662,7 @@
           <p:cNvPr id="6" name="">
             <a:extLst xmlns:a="http://schemas.openxmlformats.org/drawingml/2006/main">
               <a:ext uri="{FF2B5EF4-FFF2-40B4-BE49-F238E27FC236}">
-                <a16:creationId xmlns:a16="http://schemas.microsoft.com/office/drawing/2014/main" id="{D2DDCF7F-FC21-4C1A-B8ED-2746DE52D8FF}"/>
+                <a16:creationId xmlns:a16="http://schemas.microsoft.com/office/drawing/2014/main" id="{D4C79D16-3AD0-4E91-95A1-F10747157F08}"/>
               </a:ext>
             </a:extLst>
           </p:cNvPr>
@@ -2719,7 +2719,7 @@
           <p:cNvPr id="7" name="">
             <a:extLst xmlns:a="http://schemas.openxmlformats.org/drawingml/2006/main">
               <a:ext uri="{FF2B5EF4-FFF2-40B4-BE49-F238E27FC236}">
-                <a16:creationId xmlns:a16="http://schemas.microsoft.com/office/drawing/2014/main" id="{858E9F88-29A1-4EB1-93A6-A2B2C00A7DFD}"/>
+                <a16:creationId xmlns:a16="http://schemas.microsoft.com/office/drawing/2014/main" id="{83FF5CCA-BD0A-46A2-9C67-A237EA3AD5A3}"/>
               </a:ext>
             </a:extLst>
           </p:cNvPr>
@@ -2751,7 +2751,7 @@
           <p:cNvPr id="8" name="">
             <a:extLst xmlns:a="http://schemas.openxmlformats.org/drawingml/2006/main">
               <a:ext uri="{FF2B5EF4-FFF2-40B4-BE49-F238E27FC236}">
-                <a16:creationId xmlns:a16="http://schemas.microsoft.com/office/drawing/2014/main" id="{03247497-F018-4438-9C7A-94BBFC54DED1}"/>
+                <a16:creationId xmlns:a16="http://schemas.microsoft.com/office/drawing/2014/main" id="{EDC2BE4F-AC0F-4C60-9D59-9526B2FD2E89}"/>
               </a:ext>
             </a:extLst>
           </p:cNvPr>
@@ -2808,7 +2808,7 @@
           <p:cNvPr id="9" name="">
             <a:extLst xmlns:a="http://schemas.openxmlformats.org/drawingml/2006/main">
               <a:ext uri="{FF2B5EF4-FFF2-40B4-BE49-F238E27FC236}">
-                <a16:creationId xmlns:a16="http://schemas.microsoft.com/office/drawing/2014/main" id="{2EFFB451-6A6F-4814-A476-9DE2B5B8C1A9}"/>
+                <a16:creationId xmlns:a16="http://schemas.microsoft.com/office/drawing/2014/main" id="{F3F97EB6-2371-4163-BE32-A8E5613032A4}"/>
               </a:ext>
             </a:extLst>
           </p:cNvPr>
@@ -2865,7 +2865,7 @@
           <p:cNvPr id="10" name="">
             <a:extLst xmlns:a="http://schemas.openxmlformats.org/drawingml/2006/main">
               <a:ext uri="{FF2B5EF4-FFF2-40B4-BE49-F238E27FC236}">
-                <a16:creationId xmlns:a16="http://schemas.microsoft.com/office/drawing/2014/main" id="{253A13E0-AE14-4E95-9706-9B24B07D7896}"/>
+                <a16:creationId xmlns:a16="http://schemas.microsoft.com/office/drawing/2014/main" id="{B21F63E6-33DB-4FA8-B4D5-5DB72E1891E0}"/>
               </a:ext>
             </a:extLst>
           </p:cNvPr>
@@ -2922,7 +2922,7 @@
           <p:cNvPr id="11" name="">
             <a:extLst xmlns:a="http://schemas.openxmlformats.org/drawingml/2006/main">
               <a:ext uri="{FF2B5EF4-FFF2-40B4-BE49-F238E27FC236}">
-                <a16:creationId xmlns:a16="http://schemas.microsoft.com/office/drawing/2014/main" id="{97E851FD-CE42-433A-91CF-3BDA630178C2}"/>
+                <a16:creationId xmlns:a16="http://schemas.microsoft.com/office/drawing/2014/main" id="{B6199007-0D37-4863-B28B-7E4DE2CC946D}"/>
               </a:ext>
             </a:extLst>
           </p:cNvPr>
@@ -2979,7 +2979,7 @@
           <p:cNvPr id="12" name="">
             <a:extLst xmlns:a="http://schemas.openxmlformats.org/drawingml/2006/main">
               <a:ext uri="{FF2B5EF4-FFF2-40B4-BE49-F238E27FC236}">
-                <a16:creationId xmlns:a16="http://schemas.microsoft.com/office/drawing/2014/main" id="{460B7344-9554-466C-91BB-D4C527C7C151}"/>
+                <a16:creationId xmlns:a16="http://schemas.microsoft.com/office/drawing/2014/main" id="{6822B77F-583C-4D27-8E0A-F83D3A05BBC2}"/>
               </a:ext>
             </a:extLst>
           </p:cNvPr>
@@ -3036,7 +3036,7 @@
           <p:cNvPr id="13" name="">
             <a:extLst xmlns:a="http://schemas.openxmlformats.org/drawingml/2006/main">
               <a:ext uri="{FF2B5EF4-FFF2-40B4-BE49-F238E27FC236}">
-                <a16:creationId xmlns:a16="http://schemas.microsoft.com/office/drawing/2014/main" id="{440FF7B2-96F8-4941-9299-DDC5BD2ABC55}"/>
+                <a16:creationId xmlns:a16="http://schemas.microsoft.com/office/drawing/2014/main" id="{F56258C3-2689-4538-AC30-13433AA01C21}"/>
               </a:ext>
             </a:extLst>
           </p:cNvPr>
@@ -3091,7 +3091,7 @@
     </p:spTree>
     <p:extLst>
       <p:ext uri="{BB962C8B-B14F-4D97-AF65-F5344CB8AC3E}">
-        <p14:creationId xmlns:p14="http://schemas.microsoft.com/office/powerpoint/2010/main" val="359237347"/>
+        <p14:creationId xmlns:p14="http://schemas.microsoft.com/office/powerpoint/2010/main" val="369074739"/>
       </p:ext>
     </p:extLst>
   </p:cSld>
@@ -3292,7 +3292,7 @@
           <p:cNvPr id="19" name="">
             <a:extLst xmlns:a="http://schemas.openxmlformats.org/drawingml/2006/main">
               <a:ext uri="{FF2B5EF4-FFF2-40B4-BE49-F238E27FC236}">
-                <a16:creationId xmlns:a16="http://schemas.microsoft.com/office/drawing/2014/main" id="{64705DF6-EF29-4762-B7F2-67E96D6B9620}"/>
+                <a16:creationId xmlns:a16="http://schemas.microsoft.com/office/drawing/2014/main" id="{A36C9F3F-4DE3-4420-8FC7-58056FC8970F}"/>
               </a:ext>
             </a:extLst>
           </p:cNvPr>
@@ -3324,7 +3324,7 @@
           <p:cNvPr id="2" name="">
             <a:extLst xmlns:a="http://schemas.openxmlformats.org/drawingml/2006/main">
               <a:ext uri="{FF2B5EF4-FFF2-40B4-BE49-F238E27FC236}">
-                <a16:creationId xmlns:a16="http://schemas.microsoft.com/office/drawing/2014/main" id="{FDE78BB7-BF64-4F76-A812-735FB472A73D}"/>
+                <a16:creationId xmlns:a16="http://schemas.microsoft.com/office/drawing/2014/main" id="{06708AED-6D10-4D19-B718-CEACB77D9EDC}"/>
               </a:ext>
             </a:extLst>
           </p:cNvPr>
@@ -3381,7 +3381,7 @@
           <p:cNvPr id="3" name="">
             <a:extLst xmlns:a="http://schemas.openxmlformats.org/drawingml/2006/main">
               <a:ext uri="{FF2B5EF4-FFF2-40B4-BE49-F238E27FC236}">
-                <a16:creationId xmlns:a16="http://schemas.microsoft.com/office/drawing/2014/main" id="{3BEB6B1D-A2D5-4881-9168-2B9A8E7CD7FB}"/>
+                <a16:creationId xmlns:a16="http://schemas.microsoft.com/office/drawing/2014/main" id="{7627857D-523F-4C57-9884-24A133CDB805}"/>
               </a:ext>
             </a:extLst>
           </p:cNvPr>
@@ -3413,7 +3413,7 @@
           <p:cNvPr id="4" name="">
             <a:extLst xmlns:a="http://schemas.openxmlformats.org/drawingml/2006/main">
               <a:ext uri="{FF2B5EF4-FFF2-40B4-BE49-F238E27FC236}">
-                <a16:creationId xmlns:a16="http://schemas.microsoft.com/office/drawing/2014/main" id="{4F840B48-B71C-46B4-B60B-085ECEDDE161}"/>
+                <a16:creationId xmlns:a16="http://schemas.microsoft.com/office/drawing/2014/main" id="{35146934-A7EB-4850-9AC9-6EC6E9C3A68A}"/>
               </a:ext>
             </a:extLst>
           </p:cNvPr>
@@ -3470,7 +3470,7 @@
           <p:cNvPr id="5" name="">
             <a:extLst xmlns:a="http://schemas.openxmlformats.org/drawingml/2006/main">
               <a:ext uri="{FF2B5EF4-FFF2-40B4-BE49-F238E27FC236}">
-                <a16:creationId xmlns:a16="http://schemas.microsoft.com/office/drawing/2014/main" id="{08949ABD-A250-4EF3-8C4E-569D9A61E2E5}"/>
+                <a16:creationId xmlns:a16="http://schemas.microsoft.com/office/drawing/2014/main" id="{86A1A52B-A1CC-4861-AE49-72AF53195EC7}"/>
               </a:ext>
             </a:extLst>
           </p:cNvPr>
@@ -3527,7 +3527,7 @@
           <p:cNvPr id="6" name="">
             <a:extLst xmlns:a="http://schemas.openxmlformats.org/drawingml/2006/main">
               <a:ext uri="{FF2B5EF4-FFF2-40B4-BE49-F238E27FC236}">
-                <a16:creationId xmlns:a16="http://schemas.microsoft.com/office/drawing/2014/main" id="{1383ED4E-9AD9-4D1F-A9FC-923B3EC99F61}"/>
+                <a16:creationId xmlns:a16="http://schemas.microsoft.com/office/drawing/2014/main" id="{557E1582-97F0-41D2-A0DD-AE6F438C1B68}"/>
               </a:ext>
             </a:extLst>
           </p:cNvPr>
@@ -3584,7 +3584,7 @@
           <p:cNvPr id="7" name="">
             <a:extLst xmlns:a="http://schemas.openxmlformats.org/drawingml/2006/main">
               <a:ext uri="{FF2B5EF4-FFF2-40B4-BE49-F238E27FC236}">
-                <a16:creationId xmlns:a16="http://schemas.microsoft.com/office/drawing/2014/main" id="{7221DF83-FC11-445D-83C3-579128632562}"/>
+                <a16:creationId xmlns:a16="http://schemas.microsoft.com/office/drawing/2014/main" id="{F209191B-6985-4998-86F5-8E46366E8CB5}"/>
               </a:ext>
             </a:extLst>
           </p:cNvPr>
@@ -3616,7 +3616,7 @@
           <p:cNvPr id="8" name="">
             <a:extLst xmlns:a="http://schemas.openxmlformats.org/drawingml/2006/main">
               <a:ext uri="{FF2B5EF4-FFF2-40B4-BE49-F238E27FC236}">
-                <a16:creationId xmlns:a16="http://schemas.microsoft.com/office/drawing/2014/main" id="{DC18ADF7-DF62-4FA0-8FD5-F5299FC47831}"/>
+                <a16:creationId xmlns:a16="http://schemas.microsoft.com/office/drawing/2014/main" id="{C6F71CA8-0D5C-450E-9392-3A8BF462B797}"/>
               </a:ext>
             </a:extLst>
           </p:cNvPr>
@@ -3673,7 +3673,7 @@
           <p:cNvPr id="9" name="">
             <a:extLst xmlns:a="http://schemas.openxmlformats.org/drawingml/2006/main">
               <a:ext uri="{FF2B5EF4-FFF2-40B4-BE49-F238E27FC236}">
-                <a16:creationId xmlns:a16="http://schemas.microsoft.com/office/drawing/2014/main" id="{9FDA3DE0-7A71-48FD-9986-3C9395015B9E}"/>
+                <a16:creationId xmlns:a16="http://schemas.microsoft.com/office/drawing/2014/main" id="{B91BFDA0-3CFE-43D1-8090-31D31298CEE2}"/>
               </a:ext>
             </a:extLst>
           </p:cNvPr>
@@ -3730,7 +3730,7 @@
           <p:cNvPr id="10" name="">
             <a:extLst xmlns:a="http://schemas.openxmlformats.org/drawingml/2006/main">
               <a:ext uri="{FF2B5EF4-FFF2-40B4-BE49-F238E27FC236}">
-                <a16:creationId xmlns:a16="http://schemas.microsoft.com/office/drawing/2014/main" id="{DFC6E978-4045-49AA-B701-E8DA8A5ED92D}"/>
+                <a16:creationId xmlns:a16="http://schemas.microsoft.com/office/drawing/2014/main" id="{6F7572C5-092D-44EE-8A9C-DF9D20C24E8A}"/>
               </a:ext>
             </a:extLst>
           </p:cNvPr>
@@ -3787,7 +3787,7 @@
           <p:cNvPr id="11" name="">
             <a:extLst xmlns:a="http://schemas.openxmlformats.org/drawingml/2006/main">
               <a:ext uri="{FF2B5EF4-FFF2-40B4-BE49-F238E27FC236}">
-                <a16:creationId xmlns:a16="http://schemas.microsoft.com/office/drawing/2014/main" id="{D5C45737-B2F2-4D17-B525-90D08ACBD74B}"/>
+                <a16:creationId xmlns:a16="http://schemas.microsoft.com/office/drawing/2014/main" id="{DB165F44-F67D-4958-8DC6-1E8506DC31E5}"/>
               </a:ext>
             </a:extLst>
           </p:cNvPr>
@@ -3821,7 +3821,7 @@
           <p:cNvPr id="12" name="">
             <a:extLst xmlns:a="http://schemas.openxmlformats.org/drawingml/2006/main">
               <a:ext uri="{FF2B5EF4-FFF2-40B4-BE49-F238E27FC236}">
-                <a16:creationId xmlns:a16="http://schemas.microsoft.com/office/drawing/2014/main" id="{4EA3E7A8-3E9E-46DC-B802-FFAC737CADA3}"/>
+                <a16:creationId xmlns:a16="http://schemas.microsoft.com/office/drawing/2014/main" id="{5E5C7D4E-6123-49CF-8BB0-6C508DD5195F}"/>
               </a:ext>
             </a:extLst>
           </p:cNvPr>
@@ -3878,7 +3878,7 @@
           <p:cNvPr id="13" name="">
             <a:extLst xmlns:a="http://schemas.openxmlformats.org/drawingml/2006/main">
               <a:ext uri="{FF2B5EF4-FFF2-40B4-BE49-F238E27FC236}">
-                <a16:creationId xmlns:a16="http://schemas.microsoft.com/office/drawing/2014/main" id="{86F01EFC-D66B-45A3-933B-CC6CA2A471DB}"/>
+                <a16:creationId xmlns:a16="http://schemas.microsoft.com/office/drawing/2014/main" id="{E9F19A8F-4747-4C24-95E2-1461107C8883}"/>
               </a:ext>
             </a:extLst>
           </p:cNvPr>
@@ -3935,7 +3935,7 @@
           <p:cNvPr id="14" name="">
             <a:extLst xmlns:a="http://schemas.openxmlformats.org/drawingml/2006/main">
               <a:ext uri="{FF2B5EF4-FFF2-40B4-BE49-F238E27FC236}">
-                <a16:creationId xmlns:a16="http://schemas.microsoft.com/office/drawing/2014/main" id="{1A3879B6-5007-4A5E-84AE-25EE9A193E8C}"/>
+                <a16:creationId xmlns:a16="http://schemas.microsoft.com/office/drawing/2014/main" id="{3B8BAE3A-E29B-4B3A-8288-5F9E460D1B4C}"/>
               </a:ext>
             </a:extLst>
           </p:cNvPr>
@@ -3992,7 +3992,7 @@
           <p:cNvPr id="15" name="">
             <a:extLst xmlns:a="http://schemas.openxmlformats.org/drawingml/2006/main">
               <a:ext uri="{FF2B5EF4-FFF2-40B4-BE49-F238E27FC236}">
-                <a16:creationId xmlns:a16="http://schemas.microsoft.com/office/drawing/2014/main" id="{3D700887-6DE1-471D-AA05-850E1B5FD3F3}"/>
+                <a16:creationId xmlns:a16="http://schemas.microsoft.com/office/drawing/2014/main" id="{27646A69-4FA0-4929-97AF-30F95C505746}"/>
               </a:ext>
             </a:extLst>
           </p:cNvPr>
@@ -4026,7 +4026,7 @@
           <p:cNvPr id="16" name="">
             <a:extLst xmlns:a="http://schemas.openxmlformats.org/drawingml/2006/main">
               <a:ext uri="{FF2B5EF4-FFF2-40B4-BE49-F238E27FC236}">
-                <a16:creationId xmlns:a16="http://schemas.microsoft.com/office/drawing/2014/main" id="{EB237A4F-BEEB-4D88-B6D3-601C3E3D910B}"/>
+                <a16:creationId xmlns:a16="http://schemas.microsoft.com/office/drawing/2014/main" id="{C68DA46E-9242-416A-991F-6512D0264397}"/>
               </a:ext>
             </a:extLst>
           </p:cNvPr>
@@ -4083,7 +4083,7 @@
           <p:cNvPr id="17" name="">
             <a:extLst xmlns:a="http://schemas.openxmlformats.org/drawingml/2006/main">
               <a:ext uri="{FF2B5EF4-FFF2-40B4-BE49-F238E27FC236}">
-                <a16:creationId xmlns:a16="http://schemas.microsoft.com/office/drawing/2014/main" id="{13EB64ED-5924-4D65-9BF7-DB51D0218A1D}"/>
+                <a16:creationId xmlns:a16="http://schemas.microsoft.com/office/drawing/2014/main" id="{A76D6642-9F80-4C0C-91E8-0BB7A472265D}"/>
               </a:ext>
             </a:extLst>
           </p:cNvPr>
@@ -4140,7 +4140,7 @@
           <p:cNvPr id="18" name="">
             <a:extLst xmlns:a="http://schemas.openxmlformats.org/drawingml/2006/main">
               <a:ext uri="{FF2B5EF4-FFF2-40B4-BE49-F238E27FC236}">
-                <a16:creationId xmlns:a16="http://schemas.microsoft.com/office/drawing/2014/main" id="{EA55AA04-12A2-4254-A1AA-2D9C0492BA46}"/>
+                <a16:creationId xmlns:a16="http://schemas.microsoft.com/office/drawing/2014/main" id="{DD4DCE85-1506-471A-B30E-29F8F4C2300D}"/>
               </a:ext>
             </a:extLst>
           </p:cNvPr>
@@ -4195,7 +4195,7 @@
     </p:spTree>
     <p:extLst>
       <p:ext uri="{BB962C8B-B14F-4D97-AF65-F5344CB8AC3E}">
-        <p14:creationId xmlns:p14="http://schemas.microsoft.com/office/powerpoint/2010/main" val="1057568742"/>
+        <p14:creationId xmlns:p14="http://schemas.microsoft.com/office/powerpoint/2010/main" val="2000895348"/>
       </p:ext>
     </p:extLst>
   </p:cSld>
@@ -4350,7 +4350,7 @@
           <p:cNvPr id="23" name="">
             <a:extLst xmlns:a="http://schemas.openxmlformats.org/drawingml/2006/main">
               <a:ext uri="{FF2B5EF4-FFF2-40B4-BE49-F238E27FC236}">
-                <a16:creationId xmlns:a16="http://schemas.microsoft.com/office/drawing/2014/main" id="{0872D946-0F19-4B70-AAF2-AC33D99FC6A3}"/>
+                <a16:creationId xmlns:a16="http://schemas.microsoft.com/office/drawing/2014/main" id="{9A6AB0B7-F1F4-49EF-8459-F6F5304D1660}"/>
               </a:ext>
             </a:extLst>
           </p:cNvPr>
@@ -4382,7 +4382,7 @@
           <p:cNvPr id="2" name="">
             <a:extLst xmlns:a="http://schemas.openxmlformats.org/drawingml/2006/main">
               <a:ext uri="{FF2B5EF4-FFF2-40B4-BE49-F238E27FC236}">
-                <a16:creationId xmlns:a16="http://schemas.microsoft.com/office/drawing/2014/main" id="{B8B06F0D-45A6-4DE5-8F32-E4D3850C3278}"/>
+                <a16:creationId xmlns:a16="http://schemas.microsoft.com/office/drawing/2014/main" id="{60CDAE7E-34F4-4E99-BF44-DE2F667BEB3C}"/>
               </a:ext>
             </a:extLst>
           </p:cNvPr>
@@ -4439,7 +4439,7 @@
           <p:cNvPr id="3" name="">
             <a:extLst xmlns:a="http://schemas.openxmlformats.org/drawingml/2006/main">
               <a:ext uri="{FF2B5EF4-FFF2-40B4-BE49-F238E27FC236}">
-                <a16:creationId xmlns:a16="http://schemas.microsoft.com/office/drawing/2014/main" id="{414EA4AF-08CE-4865-889B-6FCDBBC64995}"/>
+                <a16:creationId xmlns:a16="http://schemas.microsoft.com/office/drawing/2014/main" id="{3DF47C1D-F180-4FDE-8B48-28BB9B632D3B}"/>
               </a:ext>
             </a:extLst>
           </p:cNvPr>
@@ -4471,7 +4471,7 @@
           <p:cNvPr id="4" name="">
             <a:extLst xmlns:a="http://schemas.openxmlformats.org/drawingml/2006/main">
               <a:ext uri="{FF2B5EF4-FFF2-40B4-BE49-F238E27FC236}">
-                <a16:creationId xmlns:a16="http://schemas.microsoft.com/office/drawing/2014/main" id="{82C3F3F8-9685-4D30-98C5-9971D1FC828C}"/>
+                <a16:creationId xmlns:a16="http://schemas.microsoft.com/office/drawing/2014/main" id="{FEBA5F82-FC95-4629-868B-EB70F99C7E0B}"/>
               </a:ext>
             </a:extLst>
           </p:cNvPr>
@@ -4528,7 +4528,7 @@
           <p:cNvPr id="5" name="">
             <a:extLst xmlns:a="http://schemas.openxmlformats.org/drawingml/2006/main">
               <a:ext uri="{FF2B5EF4-FFF2-40B4-BE49-F238E27FC236}">
-                <a16:creationId xmlns:a16="http://schemas.microsoft.com/office/drawing/2014/main" id="{2227C3B0-92A8-437D-9661-8F663BD813F5}"/>
+                <a16:creationId xmlns:a16="http://schemas.microsoft.com/office/drawing/2014/main" id="{A3B36183-9A56-44AE-BA04-D614694C945D}"/>
               </a:ext>
             </a:extLst>
           </p:cNvPr>
@@ -4585,7 +4585,7 @@
           <p:cNvPr id="6" name="">
             <a:extLst xmlns:a="http://schemas.openxmlformats.org/drawingml/2006/main">
               <a:ext uri="{FF2B5EF4-FFF2-40B4-BE49-F238E27FC236}">
-                <a16:creationId xmlns:a16="http://schemas.microsoft.com/office/drawing/2014/main" id="{4BB07190-6FA7-4BDA-92E9-3AB41820A885}"/>
+                <a16:creationId xmlns:a16="http://schemas.microsoft.com/office/drawing/2014/main" id="{087CCE3D-C3D7-4ECC-B648-C9B2AB385414}"/>
               </a:ext>
             </a:extLst>
           </p:cNvPr>
@@ -4642,7 +4642,7 @@
           <p:cNvPr id="7" name="">
             <a:extLst xmlns:a="http://schemas.openxmlformats.org/drawingml/2006/main">
               <a:ext uri="{FF2B5EF4-FFF2-40B4-BE49-F238E27FC236}">
-                <a16:creationId xmlns:a16="http://schemas.microsoft.com/office/drawing/2014/main" id="{5D417222-77A5-4DBA-9700-298D5EDFEF13}"/>
+                <a16:creationId xmlns:a16="http://schemas.microsoft.com/office/drawing/2014/main" id="{215E3E5D-5A84-4E95-869E-3CA2902BCF46}"/>
               </a:ext>
             </a:extLst>
           </p:cNvPr>
@@ -4674,7 +4674,7 @@
           <p:cNvPr id="8" name="">
             <a:extLst xmlns:a="http://schemas.openxmlformats.org/drawingml/2006/main">
               <a:ext uri="{FF2B5EF4-FFF2-40B4-BE49-F238E27FC236}">
-                <a16:creationId xmlns:a16="http://schemas.microsoft.com/office/drawing/2014/main" id="{3067B2AB-2592-46F3-ACE3-BE65A91E9022}"/>
+                <a16:creationId xmlns:a16="http://schemas.microsoft.com/office/drawing/2014/main" id="{75911364-C64E-41EB-B519-14452BE432FE}"/>
               </a:ext>
             </a:extLst>
           </p:cNvPr>
@@ -4731,7 +4731,7 @@
           <p:cNvPr id="9" name="">
             <a:extLst xmlns:a="http://schemas.openxmlformats.org/drawingml/2006/main">
               <a:ext uri="{FF2B5EF4-FFF2-40B4-BE49-F238E27FC236}">
-                <a16:creationId xmlns:a16="http://schemas.microsoft.com/office/drawing/2014/main" id="{20C98406-A07F-496D-8B2C-73718327D492}"/>
+                <a16:creationId xmlns:a16="http://schemas.microsoft.com/office/drawing/2014/main" id="{CBE2C89D-E64E-4100-9189-8A3D8FB5DFB5}"/>
               </a:ext>
             </a:extLst>
           </p:cNvPr>
@@ -4788,7 +4788,7 @@
           <p:cNvPr id="10" name="">
             <a:extLst xmlns:a="http://schemas.openxmlformats.org/drawingml/2006/main">
               <a:ext uri="{FF2B5EF4-FFF2-40B4-BE49-F238E27FC236}">
-                <a16:creationId xmlns:a16="http://schemas.microsoft.com/office/drawing/2014/main" id="{8F39DA48-4CB4-4CB8-BFE4-3B6E2B044187}"/>
+                <a16:creationId xmlns:a16="http://schemas.microsoft.com/office/drawing/2014/main" id="{D3FFCF2B-366D-4326-A3B7-123896CB0CB8}"/>
               </a:ext>
             </a:extLst>
           </p:cNvPr>
@@ -4822,7 +4822,7 @@
           <p:cNvPr id="11" name="">
             <a:extLst xmlns:a="http://schemas.openxmlformats.org/drawingml/2006/main">
               <a:ext uri="{FF2B5EF4-FFF2-40B4-BE49-F238E27FC236}">
-                <a16:creationId xmlns:a16="http://schemas.microsoft.com/office/drawing/2014/main" id="{BF848161-F27F-41FF-83CD-B817013D870A}"/>
+                <a16:creationId xmlns:a16="http://schemas.microsoft.com/office/drawing/2014/main" id="{8815E9B3-2459-4D22-A74C-4BD1F63857EB}"/>
               </a:ext>
             </a:extLst>
           </p:cNvPr>
@@ -4854,7 +4854,7 @@
           <p:cNvPr id="12" name="">
             <a:extLst xmlns:a="http://schemas.openxmlformats.org/drawingml/2006/main">
               <a:ext uri="{FF2B5EF4-FFF2-40B4-BE49-F238E27FC236}">
-                <a16:creationId xmlns:a16="http://schemas.microsoft.com/office/drawing/2014/main" id="{CD882B32-2697-405F-92FE-BFD8B208CB16}"/>
+                <a16:creationId xmlns:a16="http://schemas.microsoft.com/office/drawing/2014/main" id="{66BC53C9-ABDD-4AE4-9657-DC3E2330F5CA}"/>
               </a:ext>
             </a:extLst>
           </p:cNvPr>
@@ -4911,7 +4911,7 @@
           <p:cNvPr id="13" name="">
             <a:extLst xmlns:a="http://schemas.openxmlformats.org/drawingml/2006/main">
               <a:ext uri="{FF2B5EF4-FFF2-40B4-BE49-F238E27FC236}">
-                <a16:creationId xmlns:a16="http://schemas.microsoft.com/office/drawing/2014/main" id="{85DD7B1C-41C4-4680-978C-BBAACD266B9E}"/>
+                <a16:creationId xmlns:a16="http://schemas.microsoft.com/office/drawing/2014/main" id="{20BDD3D1-0F42-475C-A5FF-482DDCE42FE0}"/>
               </a:ext>
             </a:extLst>
           </p:cNvPr>
@@ -4968,7 +4968,7 @@
           <p:cNvPr id="14" name="">
             <a:extLst xmlns:a="http://schemas.openxmlformats.org/drawingml/2006/main">
               <a:ext uri="{FF2B5EF4-FFF2-40B4-BE49-F238E27FC236}">
-                <a16:creationId xmlns:a16="http://schemas.microsoft.com/office/drawing/2014/main" id="{9014C0C6-D30A-4596-AA6E-3324178FE990}"/>
+                <a16:creationId xmlns:a16="http://schemas.microsoft.com/office/drawing/2014/main" id="{62869005-3832-4EAC-8D50-893E9D7B1A39}"/>
               </a:ext>
             </a:extLst>
           </p:cNvPr>
@@ -5002,7 +5002,7 @@
           <p:cNvPr id="15" name="">
             <a:extLst xmlns:a="http://schemas.openxmlformats.org/drawingml/2006/main">
               <a:ext uri="{FF2B5EF4-FFF2-40B4-BE49-F238E27FC236}">
-                <a16:creationId xmlns:a16="http://schemas.microsoft.com/office/drawing/2014/main" id="{6A8887F7-C2D5-4439-A170-D772904EA1AF}"/>
+                <a16:creationId xmlns:a16="http://schemas.microsoft.com/office/drawing/2014/main" id="{CDC2363C-DE50-4F6E-8179-BB3A8EE8AD4A}"/>
               </a:ext>
             </a:extLst>
           </p:cNvPr>
@@ -5034,7 +5034,7 @@
           <p:cNvPr id="16" name="">
             <a:extLst xmlns:a="http://schemas.openxmlformats.org/drawingml/2006/main">
               <a:ext uri="{FF2B5EF4-FFF2-40B4-BE49-F238E27FC236}">
-                <a16:creationId xmlns:a16="http://schemas.microsoft.com/office/drawing/2014/main" id="{6ADA0CEF-C387-404E-B47D-11EB42C15C87}"/>
+                <a16:creationId xmlns:a16="http://schemas.microsoft.com/office/drawing/2014/main" id="{98B5B909-8156-4C4F-8AB8-451D684249B2}"/>
               </a:ext>
             </a:extLst>
           </p:cNvPr>
@@ -5091,7 +5091,7 @@
           <p:cNvPr id="17" name="">
             <a:extLst xmlns:a="http://schemas.openxmlformats.org/drawingml/2006/main">
               <a:ext uri="{FF2B5EF4-FFF2-40B4-BE49-F238E27FC236}">
-                <a16:creationId xmlns:a16="http://schemas.microsoft.com/office/drawing/2014/main" id="{BC7384E5-F5EE-4742-858B-DE326CAF8878}"/>
+                <a16:creationId xmlns:a16="http://schemas.microsoft.com/office/drawing/2014/main" id="{430DEA82-829E-4E98-8D4D-D88E7AAF5CCF}"/>
               </a:ext>
             </a:extLst>
           </p:cNvPr>
@@ -5148,7 +5148,7 @@
           <p:cNvPr id="18" name="">
             <a:extLst xmlns:a="http://schemas.openxmlformats.org/drawingml/2006/main">
               <a:ext uri="{FF2B5EF4-FFF2-40B4-BE49-F238E27FC236}">
-                <a16:creationId xmlns:a16="http://schemas.microsoft.com/office/drawing/2014/main" id="{146391EA-AA15-4925-8A58-AB21D981DC38}"/>
+                <a16:creationId xmlns:a16="http://schemas.microsoft.com/office/drawing/2014/main" id="{59DA5E15-00BA-4D0E-94C1-71B8A3884B1A}"/>
               </a:ext>
             </a:extLst>
           </p:cNvPr>
@@ -5182,7 +5182,7 @@
           <p:cNvPr id="19" name="">
             <a:extLst xmlns:a="http://schemas.openxmlformats.org/drawingml/2006/main">
               <a:ext uri="{FF2B5EF4-FFF2-40B4-BE49-F238E27FC236}">
-                <a16:creationId xmlns:a16="http://schemas.microsoft.com/office/drawing/2014/main" id="{73AA3AB5-4205-446D-88DE-B0AF86238BF1}"/>
+                <a16:creationId xmlns:a16="http://schemas.microsoft.com/office/drawing/2014/main" id="{FAA113B9-35DF-42FE-B80F-F223AD04D3E6}"/>
               </a:ext>
             </a:extLst>
           </p:cNvPr>
@@ -5214,7 +5214,7 @@
           <p:cNvPr id="20" name="">
             <a:extLst xmlns:a="http://schemas.openxmlformats.org/drawingml/2006/main">
               <a:ext uri="{FF2B5EF4-FFF2-40B4-BE49-F238E27FC236}">
-                <a16:creationId xmlns:a16="http://schemas.microsoft.com/office/drawing/2014/main" id="{DFDBA5DC-3D73-4384-A996-A7F5CA71C034}"/>
+                <a16:creationId xmlns:a16="http://schemas.microsoft.com/office/drawing/2014/main" id="{3C84EC5D-7D2C-42C8-A4A3-D059906EC686}"/>
               </a:ext>
             </a:extLst>
           </p:cNvPr>
@@ -5271,7 +5271,7 @@
           <p:cNvPr id="21" name="">
             <a:extLst xmlns:a="http://schemas.openxmlformats.org/drawingml/2006/main">
               <a:ext uri="{FF2B5EF4-FFF2-40B4-BE49-F238E27FC236}">
-                <a16:creationId xmlns:a16="http://schemas.microsoft.com/office/drawing/2014/main" id="{BC63185D-058E-4162-BC20-52DC1D313D30}"/>
+                <a16:creationId xmlns:a16="http://schemas.microsoft.com/office/drawing/2014/main" id="{234D1219-F30B-4685-A5A3-E64FE72247CF}"/>
               </a:ext>
             </a:extLst>
           </p:cNvPr>
@@ -5328,7 +5328,7 @@
           <p:cNvPr id="22" name="">
             <a:extLst xmlns:a="http://schemas.openxmlformats.org/drawingml/2006/main">
               <a:ext uri="{FF2B5EF4-FFF2-40B4-BE49-F238E27FC236}">
-                <a16:creationId xmlns:a16="http://schemas.microsoft.com/office/drawing/2014/main" id="{3DBE89F3-5313-447A-B757-5E83AE707556}"/>
+                <a16:creationId xmlns:a16="http://schemas.microsoft.com/office/drawing/2014/main" id="{4260E906-CA2E-40E6-8742-2D7E870B0E65}"/>
               </a:ext>
             </a:extLst>
           </p:cNvPr>
@@ -5383,7 +5383,7 @@
     </p:spTree>
     <p:extLst>
       <p:ext uri="{BB962C8B-B14F-4D97-AF65-F5344CB8AC3E}">
-        <p14:creationId xmlns:p14="http://schemas.microsoft.com/office/powerpoint/2010/main" val="1459569144"/>
+        <p14:creationId xmlns:p14="http://schemas.microsoft.com/office/powerpoint/2010/main" val="649799559"/>
       </p:ext>
     </p:extLst>
   </p:cSld>
@@ -5584,7 +5584,7 @@
           <p:cNvPr id="23" name="">
             <a:extLst xmlns:a="http://schemas.openxmlformats.org/drawingml/2006/main">
               <a:ext uri="{FF2B5EF4-FFF2-40B4-BE49-F238E27FC236}">
-                <a16:creationId xmlns:a16="http://schemas.microsoft.com/office/drawing/2014/main" id="{E6B8B3C4-E20F-4994-B033-D164062C2214}"/>
+                <a16:creationId xmlns:a16="http://schemas.microsoft.com/office/drawing/2014/main" id="{B72F6AAC-9681-494C-8A25-5018AFA96658}"/>
               </a:ext>
             </a:extLst>
           </p:cNvPr>
@@ -5616,7 +5616,7 @@
           <p:cNvPr id="2" name="">
             <a:extLst xmlns:a="http://schemas.openxmlformats.org/drawingml/2006/main">
               <a:ext uri="{FF2B5EF4-FFF2-40B4-BE49-F238E27FC236}">
-                <a16:creationId xmlns:a16="http://schemas.microsoft.com/office/drawing/2014/main" id="{3A114E7A-D72F-433B-840A-265CA42F9305}"/>
+                <a16:creationId xmlns:a16="http://schemas.microsoft.com/office/drawing/2014/main" id="{6FE20A21-86ED-4895-BEC9-03AF31735231}"/>
               </a:ext>
             </a:extLst>
           </p:cNvPr>
@@ -5673,7 +5673,7 @@
           <p:cNvPr id="3" name="">
             <a:extLst xmlns:a="http://schemas.openxmlformats.org/drawingml/2006/main">
               <a:ext uri="{FF2B5EF4-FFF2-40B4-BE49-F238E27FC236}">
-                <a16:creationId xmlns:a16="http://schemas.microsoft.com/office/drawing/2014/main" id="{2B0B20F5-AAB5-467D-AAA6-2630FF1220D9}"/>
+                <a16:creationId xmlns:a16="http://schemas.microsoft.com/office/drawing/2014/main" id="{32FE9A54-4FB5-4C50-9224-B9FBB8D2578A}"/>
               </a:ext>
             </a:extLst>
           </p:cNvPr>
@@ -5705,7 +5705,7 @@
           <p:cNvPr id="4" name="">
             <a:extLst xmlns:a="http://schemas.openxmlformats.org/drawingml/2006/main">
               <a:ext uri="{FF2B5EF4-FFF2-40B4-BE49-F238E27FC236}">
-                <a16:creationId xmlns:a16="http://schemas.microsoft.com/office/drawing/2014/main" id="{20C1CB56-A169-4F65-9458-82C8C07C81F0}"/>
+                <a16:creationId xmlns:a16="http://schemas.microsoft.com/office/drawing/2014/main" id="{0F3EC4C5-523B-4BDA-A81B-0F92EF8664D8}"/>
               </a:ext>
             </a:extLst>
           </p:cNvPr>
@@ -5762,7 +5762,7 @@
           <p:cNvPr id="5" name="">
             <a:extLst xmlns:a="http://schemas.openxmlformats.org/drawingml/2006/main">
               <a:ext uri="{FF2B5EF4-FFF2-40B4-BE49-F238E27FC236}">
-                <a16:creationId xmlns:a16="http://schemas.microsoft.com/office/drawing/2014/main" id="{0D71D2AF-38DE-4F99-B4E3-7CE33FCF1A52}"/>
+                <a16:creationId xmlns:a16="http://schemas.microsoft.com/office/drawing/2014/main" id="{54DD95AB-E6D5-448D-9FD7-72D860723B94}"/>
               </a:ext>
             </a:extLst>
           </p:cNvPr>
@@ -5819,7 +5819,7 @@
           <p:cNvPr id="6" name="">
             <a:extLst xmlns:a="http://schemas.openxmlformats.org/drawingml/2006/main">
               <a:ext uri="{FF2B5EF4-FFF2-40B4-BE49-F238E27FC236}">
-                <a16:creationId xmlns:a16="http://schemas.microsoft.com/office/drawing/2014/main" id="{5148D8D6-50E2-41A9-A833-7132FFCF05AE}"/>
+                <a16:creationId xmlns:a16="http://schemas.microsoft.com/office/drawing/2014/main" id="{334B9B88-6DC3-44BE-B9B5-F0DAE3DB4EBE}"/>
               </a:ext>
             </a:extLst>
           </p:cNvPr>
@@ -5876,7 +5876,7 @@
           <p:cNvPr id="7" name="">
             <a:extLst xmlns:a="http://schemas.openxmlformats.org/drawingml/2006/main">
               <a:ext uri="{FF2B5EF4-FFF2-40B4-BE49-F238E27FC236}">
-                <a16:creationId xmlns:a16="http://schemas.microsoft.com/office/drawing/2014/main" id="{662178A2-6143-4C1A-A29B-0DFE83FC48A9}"/>
+                <a16:creationId xmlns:a16="http://schemas.microsoft.com/office/drawing/2014/main" id="{0A6B58C1-72A4-4F21-87E6-378471DE4B63}"/>
               </a:ext>
             </a:extLst>
           </p:cNvPr>
@@ -5908,7 +5908,7 @@
           <p:cNvPr id="8" name="">
             <a:extLst xmlns:a="http://schemas.openxmlformats.org/drawingml/2006/main">
               <a:ext uri="{FF2B5EF4-FFF2-40B4-BE49-F238E27FC236}">
-                <a16:creationId xmlns:a16="http://schemas.microsoft.com/office/drawing/2014/main" id="{62D2AE16-7E60-4FC0-9AD2-3D7E90C2F30E}"/>
+                <a16:creationId xmlns:a16="http://schemas.microsoft.com/office/drawing/2014/main" id="{6CF4C69D-E72A-4697-A29B-F25066D73395}"/>
               </a:ext>
             </a:extLst>
           </p:cNvPr>
@@ -5965,7 +5965,7 @@
           <p:cNvPr id="9" name="">
             <a:extLst xmlns:a="http://schemas.openxmlformats.org/drawingml/2006/main">
               <a:ext uri="{FF2B5EF4-FFF2-40B4-BE49-F238E27FC236}">
-                <a16:creationId xmlns:a16="http://schemas.microsoft.com/office/drawing/2014/main" id="{E460D2E9-DD15-47B0-BEFA-FD0DEA4217B8}"/>
+                <a16:creationId xmlns:a16="http://schemas.microsoft.com/office/drawing/2014/main" id="{C4667389-F940-4C57-8768-4FBF5D6B7E18}"/>
               </a:ext>
             </a:extLst>
           </p:cNvPr>
@@ -6022,7 +6022,7 @@
           <p:cNvPr id="10" name="">
             <a:extLst xmlns:a="http://schemas.openxmlformats.org/drawingml/2006/main">
               <a:ext uri="{FF2B5EF4-FFF2-40B4-BE49-F238E27FC236}">
-                <a16:creationId xmlns:a16="http://schemas.microsoft.com/office/drawing/2014/main" id="{57400845-F24A-4A41-9AB2-9A14E3E0B745}"/>
+                <a16:creationId xmlns:a16="http://schemas.microsoft.com/office/drawing/2014/main" id="{78C38AB2-9FB6-49F2-8757-EBE1AEE21272}"/>
               </a:ext>
             </a:extLst>
           </p:cNvPr>
@@ -6056,7 +6056,7 @@
           <p:cNvPr id="11" name="">
             <a:extLst xmlns:a="http://schemas.openxmlformats.org/drawingml/2006/main">
               <a:ext uri="{FF2B5EF4-FFF2-40B4-BE49-F238E27FC236}">
-                <a16:creationId xmlns:a16="http://schemas.microsoft.com/office/drawing/2014/main" id="{B6A56062-A10D-4C13-9556-120DC5C0B919}"/>
+                <a16:creationId xmlns:a16="http://schemas.microsoft.com/office/drawing/2014/main" id="{CA531507-17CA-469D-B7EA-9E36AA9FECD1}"/>
               </a:ext>
             </a:extLst>
           </p:cNvPr>
@@ -6088,7 +6088,7 @@
           <p:cNvPr id="12" name="">
             <a:extLst xmlns:a="http://schemas.openxmlformats.org/drawingml/2006/main">
               <a:ext uri="{FF2B5EF4-FFF2-40B4-BE49-F238E27FC236}">
-                <a16:creationId xmlns:a16="http://schemas.microsoft.com/office/drawing/2014/main" id="{86244FAD-3606-45E7-9D7B-ABDE272CFE1D}"/>
+                <a16:creationId xmlns:a16="http://schemas.microsoft.com/office/drawing/2014/main" id="{5330CB5E-43BA-4B81-AEA3-5FD86A2136F3}"/>
               </a:ext>
             </a:extLst>
           </p:cNvPr>
@@ -6145,7 +6145,7 @@
           <p:cNvPr id="13" name="">
             <a:extLst xmlns:a="http://schemas.openxmlformats.org/drawingml/2006/main">
               <a:ext uri="{FF2B5EF4-FFF2-40B4-BE49-F238E27FC236}">
-                <a16:creationId xmlns:a16="http://schemas.microsoft.com/office/drawing/2014/main" id="{D94DE210-6A0F-45DC-90E4-9D23DF9085D1}"/>
+                <a16:creationId xmlns:a16="http://schemas.microsoft.com/office/drawing/2014/main" id="{CD14D8A9-B9A8-4A25-8C6C-FAED3E197D7B}"/>
               </a:ext>
             </a:extLst>
           </p:cNvPr>
@@ -6202,7 +6202,7 @@
           <p:cNvPr id="14" name="">
             <a:extLst xmlns:a="http://schemas.openxmlformats.org/drawingml/2006/main">
               <a:ext uri="{FF2B5EF4-FFF2-40B4-BE49-F238E27FC236}">
-                <a16:creationId xmlns:a16="http://schemas.microsoft.com/office/drawing/2014/main" id="{B66792A8-3EA9-45B1-9A42-45A06E20A1B8}"/>
+                <a16:creationId xmlns:a16="http://schemas.microsoft.com/office/drawing/2014/main" id="{E447E08E-EDB4-4BAA-AE12-C0330D6C2DDB}"/>
               </a:ext>
             </a:extLst>
           </p:cNvPr>
@@ -6236,7 +6236,7 @@
           <p:cNvPr id="15" name="">
             <a:extLst xmlns:a="http://schemas.openxmlformats.org/drawingml/2006/main">
               <a:ext uri="{FF2B5EF4-FFF2-40B4-BE49-F238E27FC236}">
-                <a16:creationId xmlns:a16="http://schemas.microsoft.com/office/drawing/2014/main" id="{A16C5143-6E08-4A45-9C83-30DBAE688841}"/>
+                <a16:creationId xmlns:a16="http://schemas.microsoft.com/office/drawing/2014/main" id="{5EC4A524-A00F-44C1-BCF6-D773CA8D9DE0}"/>
               </a:ext>
             </a:extLst>
           </p:cNvPr>
@@ -6268,7 +6268,7 @@
           <p:cNvPr id="16" name="">
             <a:extLst xmlns:a="http://schemas.openxmlformats.org/drawingml/2006/main">
               <a:ext uri="{FF2B5EF4-FFF2-40B4-BE49-F238E27FC236}">
-                <a16:creationId xmlns:a16="http://schemas.microsoft.com/office/drawing/2014/main" id="{C75BA552-2FF2-42A0-A879-FA1AB5B91FA8}"/>
+                <a16:creationId xmlns:a16="http://schemas.microsoft.com/office/drawing/2014/main" id="{105649A7-1CDA-4D30-997D-796360F51CD3}"/>
               </a:ext>
             </a:extLst>
           </p:cNvPr>
@@ -6325,7 +6325,7 @@
           <p:cNvPr id="17" name="">
             <a:extLst xmlns:a="http://schemas.openxmlformats.org/drawingml/2006/main">
               <a:ext uri="{FF2B5EF4-FFF2-40B4-BE49-F238E27FC236}">
-                <a16:creationId xmlns:a16="http://schemas.microsoft.com/office/drawing/2014/main" id="{E6D03C18-DA6C-4EC2-9091-C2D7C0F6FD77}"/>
+                <a16:creationId xmlns:a16="http://schemas.microsoft.com/office/drawing/2014/main" id="{7AF0DCA4-8F3D-430D-BBBB-01037F87BC3E}"/>
               </a:ext>
             </a:extLst>
           </p:cNvPr>
@@ -6382,7 +6382,7 @@
           <p:cNvPr id="18" name="">
             <a:extLst xmlns:a="http://schemas.openxmlformats.org/drawingml/2006/main">
               <a:ext uri="{FF2B5EF4-FFF2-40B4-BE49-F238E27FC236}">
-                <a16:creationId xmlns:a16="http://schemas.microsoft.com/office/drawing/2014/main" id="{BE09F3B9-0154-4081-8DF6-CCEC8480C113}"/>
+                <a16:creationId xmlns:a16="http://schemas.microsoft.com/office/drawing/2014/main" id="{1FBB8981-BB32-4357-9968-9134B8D60DD9}"/>
               </a:ext>
             </a:extLst>
           </p:cNvPr>
@@ -6416,7 +6416,7 @@
           <p:cNvPr id="19" name="">
             <a:extLst xmlns:a="http://schemas.openxmlformats.org/drawingml/2006/main">
               <a:ext uri="{FF2B5EF4-FFF2-40B4-BE49-F238E27FC236}">
-                <a16:creationId xmlns:a16="http://schemas.microsoft.com/office/drawing/2014/main" id="{A82DDCEF-B7BE-40CC-BD8C-AD010BD96D80}"/>
+                <a16:creationId xmlns:a16="http://schemas.microsoft.com/office/drawing/2014/main" id="{29CFD3B4-E3AD-478B-8B20-04B0827AD5D1}"/>
               </a:ext>
             </a:extLst>
           </p:cNvPr>
@@ -6448,7 +6448,7 @@
           <p:cNvPr id="20" name="">
             <a:extLst xmlns:a="http://schemas.openxmlformats.org/drawingml/2006/main">
               <a:ext uri="{FF2B5EF4-FFF2-40B4-BE49-F238E27FC236}">
-                <a16:creationId xmlns:a16="http://schemas.microsoft.com/office/drawing/2014/main" id="{F79332FF-5A8A-4B47-9FE4-F6B3A9B936B0}"/>
+                <a16:creationId xmlns:a16="http://schemas.microsoft.com/office/drawing/2014/main" id="{55F2CCAE-6B70-4343-85CD-9F3E920C52B9}"/>
               </a:ext>
             </a:extLst>
           </p:cNvPr>
@@ -6505,7 +6505,7 @@
           <p:cNvPr id="21" name="">
             <a:extLst xmlns:a="http://schemas.openxmlformats.org/drawingml/2006/main">
               <a:ext uri="{FF2B5EF4-FFF2-40B4-BE49-F238E27FC236}">
-                <a16:creationId xmlns:a16="http://schemas.microsoft.com/office/drawing/2014/main" id="{7AE33A89-3516-45F8-9EB4-F064B6758CD6}"/>
+                <a16:creationId xmlns:a16="http://schemas.microsoft.com/office/drawing/2014/main" id="{FE2FCC75-C899-4D3C-A31F-6EC46B51CE0B}"/>
               </a:ext>
             </a:extLst>
           </p:cNvPr>
@@ -6562,7 +6562,7 @@
           <p:cNvPr id="22" name="">
             <a:extLst xmlns:a="http://schemas.openxmlformats.org/drawingml/2006/main">
               <a:ext uri="{FF2B5EF4-FFF2-40B4-BE49-F238E27FC236}">
-                <a16:creationId xmlns:a16="http://schemas.microsoft.com/office/drawing/2014/main" id="{D66C7412-E7C0-43F3-9450-5400687A2F25}"/>
+                <a16:creationId xmlns:a16="http://schemas.microsoft.com/office/drawing/2014/main" id="{1BCC6880-7061-4B40-AF9C-78C0AB55938C}"/>
               </a:ext>
             </a:extLst>
           </p:cNvPr>
@@ -6617,7 +6617,7 @@
     </p:spTree>
     <p:extLst>
       <p:ext uri="{BB962C8B-B14F-4D97-AF65-F5344CB8AC3E}">
-        <p14:creationId xmlns:p14="http://schemas.microsoft.com/office/powerpoint/2010/main" val="473955764"/>
+        <p14:creationId xmlns:p14="http://schemas.microsoft.com/office/powerpoint/2010/main" val="2036223237"/>
       </p:ext>
     </p:extLst>
   </p:cSld>
@@ -6818,7 +6818,7 @@
           <p:cNvPr id="16" name="">
             <a:extLst xmlns:a="http://schemas.openxmlformats.org/drawingml/2006/main">
               <a:ext uri="{FF2B5EF4-FFF2-40B4-BE49-F238E27FC236}">
-                <a16:creationId xmlns:a16="http://schemas.microsoft.com/office/drawing/2014/main" id="{B7C8314A-2F0F-4F1C-B413-C2C229454118}"/>
+                <a16:creationId xmlns:a16="http://schemas.microsoft.com/office/drawing/2014/main" id="{DBF35AB1-7AB4-4C63-B064-02EA14EEE8A0}"/>
               </a:ext>
             </a:extLst>
           </p:cNvPr>
@@ -6850,7 +6850,7 @@
           <p:cNvPr id="2" name="">
             <a:extLst xmlns:a="http://schemas.openxmlformats.org/drawingml/2006/main">
               <a:ext uri="{FF2B5EF4-FFF2-40B4-BE49-F238E27FC236}">
-                <a16:creationId xmlns:a16="http://schemas.microsoft.com/office/drawing/2014/main" id="{43C3F963-809C-482D-987F-DB96153D5D5E}"/>
+                <a16:creationId xmlns:a16="http://schemas.microsoft.com/office/drawing/2014/main" id="{0D699021-ACE5-4B3E-832E-15689FCA7D40}"/>
               </a:ext>
             </a:extLst>
           </p:cNvPr>
@@ -6907,7 +6907,7 @@
           <p:cNvPr id="3" name="">
             <a:extLst xmlns:a="http://schemas.openxmlformats.org/drawingml/2006/main">
               <a:ext uri="{FF2B5EF4-FFF2-40B4-BE49-F238E27FC236}">
-                <a16:creationId xmlns:a16="http://schemas.microsoft.com/office/drawing/2014/main" id="{6742EC03-77B5-4090-BCE9-59DAFEF7E666}"/>
+                <a16:creationId xmlns:a16="http://schemas.microsoft.com/office/drawing/2014/main" id="{803C4B54-E2FA-4534-B0BC-36FEC600F0DB}"/>
               </a:ext>
             </a:extLst>
           </p:cNvPr>
@@ -6939,7 +6939,7 @@
           <p:cNvPr id="4" name="">
             <a:extLst xmlns:a="http://schemas.openxmlformats.org/drawingml/2006/main">
               <a:ext uri="{FF2B5EF4-FFF2-40B4-BE49-F238E27FC236}">
-                <a16:creationId xmlns:a16="http://schemas.microsoft.com/office/drawing/2014/main" id="{53752117-2050-4BE1-8CDB-EF9326844759}"/>
+                <a16:creationId xmlns:a16="http://schemas.microsoft.com/office/drawing/2014/main" id="{2EB523A4-93CE-4189-AB52-E81F660B5247}"/>
               </a:ext>
             </a:extLst>
           </p:cNvPr>
@@ -6996,7 +6996,7 @@
           <p:cNvPr id="5" name="">
             <a:extLst xmlns:a="http://schemas.openxmlformats.org/drawingml/2006/main">
               <a:ext uri="{FF2B5EF4-FFF2-40B4-BE49-F238E27FC236}">
-                <a16:creationId xmlns:a16="http://schemas.microsoft.com/office/drawing/2014/main" id="{9A7CD272-AEC7-4637-8C61-7F6C1B339CF9}"/>
+                <a16:creationId xmlns:a16="http://schemas.microsoft.com/office/drawing/2014/main" id="{C43971F2-0E08-4716-BC4B-91CD25BB9707}"/>
               </a:ext>
             </a:extLst>
           </p:cNvPr>
@@ -7053,7 +7053,7 @@
           <p:cNvPr id="6" name="">
             <a:extLst xmlns:a="http://schemas.openxmlformats.org/drawingml/2006/main">
               <a:ext uri="{FF2B5EF4-FFF2-40B4-BE49-F238E27FC236}">
-                <a16:creationId xmlns:a16="http://schemas.microsoft.com/office/drawing/2014/main" id="{6F69CD4F-0327-48CC-AD94-41F1D14C7D09}"/>
+                <a16:creationId xmlns:a16="http://schemas.microsoft.com/office/drawing/2014/main" id="{455985A1-EB5E-414A-BA79-9119043592F0}"/>
               </a:ext>
             </a:extLst>
           </p:cNvPr>
@@ -7110,7 +7110,7 @@
           <p:cNvPr id="7" name="">
             <a:extLst xmlns:a="http://schemas.openxmlformats.org/drawingml/2006/main">
               <a:ext uri="{FF2B5EF4-FFF2-40B4-BE49-F238E27FC236}">
-                <a16:creationId xmlns:a16="http://schemas.microsoft.com/office/drawing/2014/main" id="{07D133EC-900D-4FAC-AFAC-D07813EA356C}"/>
+                <a16:creationId xmlns:a16="http://schemas.microsoft.com/office/drawing/2014/main" id="{47DD2CBB-C14F-4CF7-BAEA-2539242890A6}"/>
               </a:ext>
             </a:extLst>
           </p:cNvPr>
@@ -7142,7 +7142,7 @@
           <p:cNvPr id="8" name="">
             <a:extLst xmlns:a="http://schemas.openxmlformats.org/drawingml/2006/main">
               <a:ext uri="{FF2B5EF4-FFF2-40B4-BE49-F238E27FC236}">
-                <a16:creationId xmlns:a16="http://schemas.microsoft.com/office/drawing/2014/main" id="{06E0BE97-0FE2-4127-8BB1-7011060B10EA}"/>
+                <a16:creationId xmlns:a16="http://schemas.microsoft.com/office/drawing/2014/main" id="{A6AA3E59-0501-4062-92B5-69B06D340FCC}"/>
               </a:ext>
             </a:extLst>
           </p:cNvPr>
@@ -7199,7 +7199,7 @@
           <p:cNvPr id="9" name="">
             <a:extLst xmlns:a="http://schemas.openxmlformats.org/drawingml/2006/main">
               <a:ext uri="{FF2B5EF4-FFF2-40B4-BE49-F238E27FC236}">
-                <a16:creationId xmlns:a16="http://schemas.microsoft.com/office/drawing/2014/main" id="{6287906F-44CD-4ED5-8355-C4DA34032DB4}"/>
+                <a16:creationId xmlns:a16="http://schemas.microsoft.com/office/drawing/2014/main" id="{984CF1A7-A830-4F12-A152-770C7D420C02}"/>
               </a:ext>
             </a:extLst>
           </p:cNvPr>
@@ -7256,7 +7256,7 @@
           <p:cNvPr id="10" name="">
             <a:extLst xmlns:a="http://schemas.openxmlformats.org/drawingml/2006/main">
               <a:ext uri="{FF2B5EF4-FFF2-40B4-BE49-F238E27FC236}">
-                <a16:creationId xmlns:a16="http://schemas.microsoft.com/office/drawing/2014/main" id="{C3763306-9A56-4B4B-A5DA-7FCA4FFE9466}"/>
+                <a16:creationId xmlns:a16="http://schemas.microsoft.com/office/drawing/2014/main" id="{42188DD1-F8ED-4355-8488-0FC226FA52A3}"/>
               </a:ext>
             </a:extLst>
           </p:cNvPr>
@@ -7313,7 +7313,7 @@
           <p:cNvPr id="11" name="">
             <a:extLst xmlns:a="http://schemas.openxmlformats.org/drawingml/2006/main">
               <a:ext uri="{FF2B5EF4-FFF2-40B4-BE49-F238E27FC236}">
-                <a16:creationId xmlns:a16="http://schemas.microsoft.com/office/drawing/2014/main" id="{31593636-B445-4820-8FBD-58D987DB462A}"/>
+                <a16:creationId xmlns:a16="http://schemas.microsoft.com/office/drawing/2014/main" id="{8030C526-8654-466C-BC1E-C8AD735298B2}"/>
               </a:ext>
             </a:extLst>
           </p:cNvPr>
@@ -7345,7 +7345,7 @@
           <p:cNvPr id="12" name="">
             <a:extLst xmlns:a="http://schemas.openxmlformats.org/drawingml/2006/main">
               <a:ext uri="{FF2B5EF4-FFF2-40B4-BE49-F238E27FC236}">
-                <a16:creationId xmlns:a16="http://schemas.microsoft.com/office/drawing/2014/main" id="{9025CCCC-D780-4971-808D-40451562466B}"/>
+                <a16:creationId xmlns:a16="http://schemas.microsoft.com/office/drawing/2014/main" id="{86DC629F-D13E-40C4-9300-0713CC745E78}"/>
               </a:ext>
             </a:extLst>
           </p:cNvPr>
@@ -7402,7 +7402,7 @@
           <p:cNvPr id="13" name="">
             <a:extLst xmlns:a="http://schemas.openxmlformats.org/drawingml/2006/main">
               <a:ext uri="{FF2B5EF4-FFF2-40B4-BE49-F238E27FC236}">
-                <a16:creationId xmlns:a16="http://schemas.microsoft.com/office/drawing/2014/main" id="{CB61583D-8871-4A82-ADCD-42A503A5D02F}"/>
+                <a16:creationId xmlns:a16="http://schemas.microsoft.com/office/drawing/2014/main" id="{CD37D5E0-4916-4BEF-8963-69C74A8F486D}"/>
               </a:ext>
             </a:extLst>
           </p:cNvPr>
@@ -7459,7 +7459,7 @@
           <p:cNvPr id="14" name="">
             <a:extLst xmlns:a="http://schemas.openxmlformats.org/drawingml/2006/main">
               <a:ext uri="{FF2B5EF4-FFF2-40B4-BE49-F238E27FC236}">
-                <a16:creationId xmlns:a16="http://schemas.microsoft.com/office/drawing/2014/main" id="{C5F275FC-F1C9-4333-9E12-9AEF698C01D9}"/>
+                <a16:creationId xmlns:a16="http://schemas.microsoft.com/office/drawing/2014/main" id="{73F4B1BF-AE98-4F9B-B50F-FA6805B383BD}"/>
               </a:ext>
             </a:extLst>
           </p:cNvPr>
@@ -7516,7 +7516,7 @@
           <p:cNvPr id="15" name="">
             <a:extLst xmlns:a="http://schemas.openxmlformats.org/drawingml/2006/main">
               <a:ext uri="{FF2B5EF4-FFF2-40B4-BE49-F238E27FC236}">
-                <a16:creationId xmlns:a16="http://schemas.microsoft.com/office/drawing/2014/main" id="{A4EE05E4-90DE-466D-AFA3-FB5CC15FEF7D}"/>
+                <a16:creationId xmlns:a16="http://schemas.microsoft.com/office/drawing/2014/main" id="{6DB85BD2-DCC5-4410-A670-16685C6B6E94}"/>
               </a:ext>
             </a:extLst>
           </p:cNvPr>
@@ -7571,7 +7571,7 @@
     </p:spTree>
     <p:extLst>
       <p:ext uri="{BB962C8B-B14F-4D97-AF65-F5344CB8AC3E}">
-        <p14:creationId xmlns:p14="http://schemas.microsoft.com/office/powerpoint/2010/main" val="21600300"/>
+        <p14:creationId xmlns:p14="http://schemas.microsoft.com/office/powerpoint/2010/main" val="668654910"/>
       </p:ext>
     </p:extLst>
   </p:cSld>
@@ -7772,7 +7772,7 @@
           <p:cNvPr id="23" name="">
             <a:extLst xmlns:a="http://schemas.openxmlformats.org/drawingml/2006/main">
               <a:ext uri="{FF2B5EF4-FFF2-40B4-BE49-F238E27FC236}">
-                <a16:creationId xmlns:a16="http://schemas.microsoft.com/office/drawing/2014/main" id="{5B3F99FE-2AEC-4A89-A849-743D6AD0B165}"/>
+                <a16:creationId xmlns:a16="http://schemas.microsoft.com/office/drawing/2014/main" id="{6E4D296B-14AB-4FB1-BE81-D92DC0EDFAC3}"/>
               </a:ext>
             </a:extLst>
           </p:cNvPr>
@@ -7804,7 +7804,7 @@
           <p:cNvPr id="2" name="">
             <a:extLst xmlns:a="http://schemas.openxmlformats.org/drawingml/2006/main">
               <a:ext uri="{FF2B5EF4-FFF2-40B4-BE49-F238E27FC236}">
-                <a16:creationId xmlns:a16="http://schemas.microsoft.com/office/drawing/2014/main" id="{1F836CC6-0016-48E9-9CF1-1596AA987D96}"/>
+                <a16:creationId xmlns:a16="http://schemas.microsoft.com/office/drawing/2014/main" id="{F2836A63-E1D7-4610-952A-F70A9D2C98A2}"/>
               </a:ext>
             </a:extLst>
           </p:cNvPr>
@@ -7861,7 +7861,7 @@
           <p:cNvPr id="3" name="">
             <a:extLst xmlns:a="http://schemas.openxmlformats.org/drawingml/2006/main">
               <a:ext uri="{FF2B5EF4-FFF2-40B4-BE49-F238E27FC236}">
-                <a16:creationId xmlns:a16="http://schemas.microsoft.com/office/drawing/2014/main" id="{F1C9924F-32A4-44FD-B78C-CF4E546A6636}"/>
+                <a16:creationId xmlns:a16="http://schemas.microsoft.com/office/drawing/2014/main" id="{711C4667-1593-4627-B3BD-A9059AB77FB7}"/>
               </a:ext>
             </a:extLst>
           </p:cNvPr>
@@ -7893,7 +7893,7 @@
           <p:cNvPr id="4" name="">
             <a:extLst xmlns:a="http://schemas.openxmlformats.org/drawingml/2006/main">
               <a:ext uri="{FF2B5EF4-FFF2-40B4-BE49-F238E27FC236}">
-                <a16:creationId xmlns:a16="http://schemas.microsoft.com/office/drawing/2014/main" id="{2F1548CF-2C37-49D6-8056-8DD25B468BE8}"/>
+                <a16:creationId xmlns:a16="http://schemas.microsoft.com/office/drawing/2014/main" id="{15885650-9728-4491-9A03-E96C0F915DCE}"/>
               </a:ext>
             </a:extLst>
           </p:cNvPr>
@@ -7950,7 +7950,7 @@
           <p:cNvPr id="5" name="">
             <a:extLst xmlns:a="http://schemas.openxmlformats.org/drawingml/2006/main">
               <a:ext uri="{FF2B5EF4-FFF2-40B4-BE49-F238E27FC236}">
-                <a16:creationId xmlns:a16="http://schemas.microsoft.com/office/drawing/2014/main" id="{A1860D01-94CC-4B5B-BC5E-EB967E671531}"/>
+                <a16:creationId xmlns:a16="http://schemas.microsoft.com/office/drawing/2014/main" id="{7BAAA61B-E058-4F55-9EDE-D7E1C8E5A81F}"/>
               </a:ext>
             </a:extLst>
           </p:cNvPr>
@@ -8007,7 +8007,7 @@
           <p:cNvPr id="6" name="">
             <a:extLst xmlns:a="http://schemas.openxmlformats.org/drawingml/2006/main">
               <a:ext uri="{FF2B5EF4-FFF2-40B4-BE49-F238E27FC236}">
-                <a16:creationId xmlns:a16="http://schemas.microsoft.com/office/drawing/2014/main" id="{F7F4DD51-E006-4D3F-B73B-9EB1E49A789D}"/>
+                <a16:creationId xmlns:a16="http://schemas.microsoft.com/office/drawing/2014/main" id="{BBAC0F14-DFC2-49DA-B94D-0E859DE8F749}"/>
               </a:ext>
             </a:extLst>
           </p:cNvPr>
@@ -8064,7 +8064,7 @@
           <p:cNvPr id="7" name="">
             <a:extLst xmlns:a="http://schemas.openxmlformats.org/drawingml/2006/main">
               <a:ext uri="{FF2B5EF4-FFF2-40B4-BE49-F238E27FC236}">
-                <a16:creationId xmlns:a16="http://schemas.microsoft.com/office/drawing/2014/main" id="{7DE5EE17-D2CD-407E-85B8-E2483D9C8E9D}"/>
+                <a16:creationId xmlns:a16="http://schemas.microsoft.com/office/drawing/2014/main" id="{A91DBC29-A7AE-403A-A5FE-3A003974E926}"/>
               </a:ext>
             </a:extLst>
           </p:cNvPr>
@@ -8096,7 +8096,7 @@
           <p:cNvPr id="8" name="">
             <a:extLst xmlns:a="http://schemas.openxmlformats.org/drawingml/2006/main">
               <a:ext uri="{FF2B5EF4-FFF2-40B4-BE49-F238E27FC236}">
-                <a16:creationId xmlns:a16="http://schemas.microsoft.com/office/drawing/2014/main" id="{4457E0FA-AD7F-4247-A7D4-8BDECB9B294A}"/>
+                <a16:creationId xmlns:a16="http://schemas.microsoft.com/office/drawing/2014/main" id="{40A266A7-A9B3-48D4-AECC-6FBF914DF591}"/>
               </a:ext>
             </a:extLst>
           </p:cNvPr>
@@ -8153,7 +8153,7 @@
           <p:cNvPr id="9" name="">
             <a:extLst xmlns:a="http://schemas.openxmlformats.org/drawingml/2006/main">
               <a:ext uri="{FF2B5EF4-FFF2-40B4-BE49-F238E27FC236}">
-                <a16:creationId xmlns:a16="http://schemas.microsoft.com/office/drawing/2014/main" id="{5B775A75-8F26-470F-B8A6-EC616D2D83EF}"/>
+                <a16:creationId xmlns:a16="http://schemas.microsoft.com/office/drawing/2014/main" id="{7111F03E-3D85-49F1-A0E7-FCAF5EADE48B}"/>
               </a:ext>
             </a:extLst>
           </p:cNvPr>
@@ -8210,19 +8210,19 @@
           <p:cNvPr id="10" name="">
             <a:extLst xmlns:a="http://schemas.openxmlformats.org/drawingml/2006/main">
               <a:ext uri="{FF2B5EF4-FFF2-40B4-BE49-F238E27FC236}">
-                <a16:creationId xmlns:a16="http://schemas.microsoft.com/office/drawing/2014/main" id="{3BAE4ADA-0C83-4150-9D9F-FD678D95F0F3}"/>
-              </a:ext>
-            </a:extLst>
-          </p:cNvPr>
-          <p:cNvSpPr>
-            <a:spLocks xmlns:a="http://schemas.openxmlformats.org/drawingml/2006/main" noGrp="1"/>
-          </p:cNvSpPr>
-          <p:nvPr/>
-        </p:nvSpPr>
-        <p:spPr>
-          <a:xfrm xmlns:a="http://schemas.openxmlformats.org/drawingml/2006/main">
-            <a:off x="914400" y="1257300"/>
-            <a:ext cx="10363200" cy="781050"/>
+                <a16:creationId xmlns:a16="http://schemas.microsoft.com/office/drawing/2014/main" id="{A806C8F4-9939-4BE0-B644-B50171C8807B}"/>
+              </a:ext>
+            </a:extLst>
+          </p:cNvPr>
+          <p:cNvSpPr>
+            <a:spLocks xmlns:a="http://schemas.openxmlformats.org/drawingml/2006/main" noGrp="1"/>
+          </p:cNvSpPr>
+          <p:nvPr/>
+        </p:nvSpPr>
+        <p:spPr>
+          <a:xfrm xmlns:a="http://schemas.openxmlformats.org/drawingml/2006/main">
+            <a:off x="857250" y="1219200"/>
+            <a:ext cx="10477500" cy="742950"/>
           </a:xfrm>
           <a:prstGeom xmlns:a="http://schemas.openxmlformats.org/drawingml/2006/main" prst="rect">
             <a:avLst/>
@@ -8239,7 +8239,7 @@
           <a:lstStyle xmlns:a="http://schemas.openxmlformats.org/drawingml/2006/main"/>
           <a:p xmlns:a="http://schemas.openxmlformats.org/drawingml/2006/main">
             <a:pPr algn="ctr">
-              <a:defRPr sz="2175" b="1">
+              <a:defRPr sz="2100" b="1">
                 <a:solidFill>
                   <a:srgbClr val="17253A"/>
                 </a:solidFill>
@@ -8249,7 +8249,7 @@
               </a:defRPr>
             </a:pPr>
             <a:r>
-              <a:rPr sz="2175" b="1">
+              <a:rPr sz="2100" b="1">
                 <a:solidFill>
                   <a:srgbClr val="17253A"/>
                 </a:solidFill>
@@ -8267,28 +8267,30 @@
           <p:cNvPr id="11" name="">
             <a:extLst xmlns:a="http://schemas.openxmlformats.org/drawingml/2006/main">
               <a:ext uri="{FF2B5EF4-FFF2-40B4-BE49-F238E27FC236}">
-                <a16:creationId xmlns:a16="http://schemas.microsoft.com/office/drawing/2014/main" id="{61A678AF-AC2A-41D5-83F2-2B6CB7E11954}"/>
-              </a:ext>
-            </a:extLst>
-          </p:cNvPr>
-          <p:cNvSpPr>
-            <a:spLocks xmlns:a="http://schemas.openxmlformats.org/drawingml/2006/main" noGrp="1"/>
-          </p:cNvSpPr>
-          <p:nvPr/>
-        </p:nvSpPr>
-        <p:spPr>
-          <a:xfrm xmlns:a="http://schemas.openxmlformats.org/drawingml/2006/main">
-            <a:off x="1000125" y="2247900"/>
-            <a:ext cx="476250" cy="476250"/>
-          </a:xfrm>
-          <a:prstGeom xmlns:a="http://schemas.openxmlformats.org/drawingml/2006/main" prst="ellipse">
+                <a16:creationId xmlns:a16="http://schemas.microsoft.com/office/drawing/2014/main" id="{39D15ED7-86DE-4D02-8180-C56F2501D08E}"/>
+              </a:ext>
+            </a:extLst>
+          </p:cNvPr>
+          <p:cNvSpPr>
+            <a:spLocks xmlns:a="http://schemas.openxmlformats.org/drawingml/2006/main" noGrp="1"/>
+          </p:cNvSpPr>
+          <p:nvPr/>
+        </p:nvSpPr>
+        <p:spPr>
+          <a:xfrm xmlns:a="http://schemas.openxmlformats.org/drawingml/2006/main">
+            <a:off x="971550" y="2124075"/>
+            <a:ext cx="38100" cy="3524250"/>
+          </a:xfrm>
+          <a:prstGeom xmlns:a="http://schemas.openxmlformats.org/drawingml/2006/main" prst="rect">
             <a:avLst/>
           </a:prstGeom>
           <a:solidFill xmlns:a="http://schemas.openxmlformats.org/drawingml/2006/main">
-            <a:srgbClr val="18324A"/>
+            <a:srgbClr val="2C6E73"/>
           </a:solidFill>
           <a:ln xmlns:a="http://schemas.openxmlformats.org/drawingml/2006/main" w="0">
-            <a:noFill/>
+            <a:solidFill>
+              <a:srgbClr val="2C6E73"/>
+            </a:solidFill>
           </a:ln>
         </p:spPr>
       </p:sp>
@@ -8297,19 +8299,19 @@
           <p:cNvPr id="12" name="">
             <a:extLst xmlns:a="http://schemas.openxmlformats.org/drawingml/2006/main">
               <a:ext uri="{FF2B5EF4-FFF2-40B4-BE49-F238E27FC236}">
-                <a16:creationId xmlns:a16="http://schemas.microsoft.com/office/drawing/2014/main" id="{DC599C30-BEE2-4095-8B36-25BCF09DC58D}"/>
-              </a:ext>
-            </a:extLst>
-          </p:cNvPr>
-          <p:cNvSpPr>
-            <a:spLocks xmlns:a="http://schemas.openxmlformats.org/drawingml/2006/main" noGrp="1"/>
-          </p:cNvSpPr>
-          <p:nvPr/>
-        </p:nvSpPr>
-        <p:spPr>
-          <a:xfrm xmlns:a="http://schemas.openxmlformats.org/drawingml/2006/main">
-            <a:off x="1000125" y="2276475"/>
-            <a:ext cx="476250" cy="419100"/>
+                <a16:creationId xmlns:a16="http://schemas.microsoft.com/office/drawing/2014/main" id="{00372064-A016-4945-882A-92F1FF867D39}"/>
+              </a:ext>
+            </a:extLst>
+          </p:cNvPr>
+          <p:cNvSpPr>
+            <a:spLocks xmlns:a="http://schemas.openxmlformats.org/drawingml/2006/main" noGrp="1"/>
+          </p:cNvSpPr>
+          <p:nvPr/>
+        </p:nvSpPr>
+        <p:spPr>
+          <a:xfrm xmlns:a="http://schemas.openxmlformats.org/drawingml/2006/main">
+            <a:off x="1162050" y="2200275"/>
+            <a:ext cx="400050" cy="400050"/>
           </a:xfrm>
           <a:prstGeom xmlns:a="http://schemas.openxmlformats.org/drawingml/2006/main" prst="rect">
             <a:avLst/>
@@ -8326,9 +8328,9 @@
           <a:lstStyle xmlns:a="http://schemas.openxmlformats.org/drawingml/2006/main"/>
           <a:p xmlns:a="http://schemas.openxmlformats.org/drawingml/2006/main">
             <a:pPr algn="ctr">
-              <a:defRPr sz="1350" b="1">
-                <a:solidFill>
-                  <a:srgbClr val="FFFFFF"/>
+              <a:defRPr sz="1125" b="1">
+                <a:solidFill>
+                  <a:srgbClr val="2C6E73"/>
                 </a:solidFill>
                 <a:latin typeface="Arial"/>
                 <a:ea typeface="Arial"/>
@@ -8336,9 +8338,9 @@
               </a:defRPr>
             </a:pPr>
             <a:r>
-              <a:rPr sz="1350" b="1">
-                <a:solidFill>
-                  <a:srgbClr val="FFFFFF"/>
+              <a:rPr sz="1125" b="1">
+                <a:solidFill>
+                  <a:srgbClr val="2C6E73"/>
                 </a:solidFill>
                 <a:latin typeface="Arial"/>
                 <a:ea typeface="Arial"/>
@@ -8354,19 +8356,19 @@
           <p:cNvPr id="13" name="">
             <a:extLst xmlns:a="http://schemas.openxmlformats.org/drawingml/2006/main">
               <a:ext uri="{FF2B5EF4-FFF2-40B4-BE49-F238E27FC236}">
-                <a16:creationId xmlns:a16="http://schemas.microsoft.com/office/drawing/2014/main" id="{1B58766E-DD95-4CED-848B-D59A3ED7F0E4}"/>
-              </a:ext>
-            </a:extLst>
-          </p:cNvPr>
-          <p:cNvSpPr>
-            <a:spLocks xmlns:a="http://schemas.openxmlformats.org/drawingml/2006/main" noGrp="1"/>
-          </p:cNvSpPr>
-          <p:nvPr/>
-        </p:nvSpPr>
-        <p:spPr>
-          <a:xfrm xmlns:a="http://schemas.openxmlformats.org/drawingml/2006/main">
-            <a:off x="1714500" y="2181225"/>
-            <a:ext cx="9429750" cy="609600"/>
+                <a16:creationId xmlns:a16="http://schemas.microsoft.com/office/drawing/2014/main" id="{44450504-69D5-4761-BA9C-19422D5DCD07}"/>
+              </a:ext>
+            </a:extLst>
+          </p:cNvPr>
+          <p:cNvSpPr>
+            <a:spLocks xmlns:a="http://schemas.openxmlformats.org/drawingml/2006/main" noGrp="1"/>
+          </p:cNvSpPr>
+          <p:nvPr/>
+        </p:nvSpPr>
+        <p:spPr>
+          <a:xfrm xmlns:a="http://schemas.openxmlformats.org/drawingml/2006/main">
+            <a:off x="1714500" y="2114550"/>
+            <a:ext cx="9525000" cy="809625"/>
           </a:xfrm>
           <a:prstGeom xmlns:a="http://schemas.openxmlformats.org/drawingml/2006/main" prst="rect">
             <a:avLst/>
@@ -8383,7 +8385,7 @@
           <a:lstStyle xmlns:a="http://schemas.openxmlformats.org/drawingml/2006/main"/>
           <a:p xmlns:a="http://schemas.openxmlformats.org/drawingml/2006/main">
             <a:pPr algn="l">
-              <a:defRPr sz="1500" b="0">
+              <a:defRPr sz="1725" b="0">
                 <a:solidFill>
                   <a:srgbClr val="17253A"/>
                 </a:solidFill>
@@ -8393,7 +8395,7 @@
               </a:defRPr>
             </a:pPr>
             <a:r>
-              <a:rPr sz="1500" b="0">
+              <a:rPr sz="1725" b="0">
                 <a:solidFill>
                   <a:srgbClr val="17253A"/>
                 </a:solidFill>
@@ -8401,7 +8403,7 @@
                 <a:ea typeface="Arial"/>
                 <a:cs typeface="Arial"/>
               </a:rPr>
-              <a:t>Identify the structure: Convert mixed numbers to improper fractions when needed.</a:t>
+              <a:t>2/3 of 3/5 m</a:t>
             </a:r>
           </a:p>
         </p:txBody>
@@ -8411,28 +8413,30 @@
           <p:cNvPr id="14" name="">
             <a:extLst xmlns:a="http://schemas.openxmlformats.org/drawingml/2006/main">
               <a:ext uri="{FF2B5EF4-FFF2-40B4-BE49-F238E27FC236}">
-                <a16:creationId xmlns:a16="http://schemas.microsoft.com/office/drawing/2014/main" id="{5CDA087E-3833-4AFA-B487-0C7E6DED897A}"/>
-              </a:ext>
-            </a:extLst>
-          </p:cNvPr>
-          <p:cNvSpPr>
-            <a:spLocks xmlns:a="http://schemas.openxmlformats.org/drawingml/2006/main" noGrp="1"/>
-          </p:cNvSpPr>
-          <p:nvPr/>
-        </p:nvSpPr>
-        <p:spPr>
-          <a:xfrm xmlns:a="http://schemas.openxmlformats.org/drawingml/2006/main">
-            <a:off x="1000125" y="2990850"/>
-            <a:ext cx="476250" cy="476250"/>
-          </a:xfrm>
-          <a:prstGeom xmlns:a="http://schemas.openxmlformats.org/drawingml/2006/main" prst="ellipse">
+                <a16:creationId xmlns:a16="http://schemas.microsoft.com/office/drawing/2014/main" id="{EF35CA11-7476-47F1-B098-CD5C2D8D68FA}"/>
+              </a:ext>
+            </a:extLst>
+          </p:cNvPr>
+          <p:cNvSpPr>
+            <a:spLocks xmlns:a="http://schemas.openxmlformats.org/drawingml/2006/main" noGrp="1"/>
+          </p:cNvSpPr>
+          <p:nvPr/>
+        </p:nvSpPr>
+        <p:spPr>
+          <a:xfrm xmlns:a="http://schemas.openxmlformats.org/drawingml/2006/main">
+            <a:off x="1714500" y="2943225"/>
+            <a:ext cx="9334500" cy="9525"/>
+          </a:xfrm>
+          <a:prstGeom xmlns:a="http://schemas.openxmlformats.org/drawingml/2006/main" prst="rect">
             <a:avLst/>
           </a:prstGeom>
           <a:solidFill xmlns:a="http://schemas.openxmlformats.org/drawingml/2006/main">
-            <a:srgbClr val="2C6E73"/>
+            <a:srgbClr val="D9E0E6"/>
           </a:solidFill>
           <a:ln xmlns:a="http://schemas.openxmlformats.org/drawingml/2006/main" w="0">
-            <a:noFill/>
+            <a:solidFill>
+              <a:srgbClr val="D9E0E6"/>
+            </a:solidFill>
           </a:ln>
         </p:spPr>
       </p:sp>
@@ -8441,19 +8445,19 @@
           <p:cNvPr id="15" name="">
             <a:extLst xmlns:a="http://schemas.openxmlformats.org/drawingml/2006/main">
               <a:ext uri="{FF2B5EF4-FFF2-40B4-BE49-F238E27FC236}">
-                <a16:creationId xmlns:a16="http://schemas.microsoft.com/office/drawing/2014/main" id="{A9F4BFF8-E1E3-49D9-9596-AB47E522A46E}"/>
-              </a:ext>
-            </a:extLst>
-          </p:cNvPr>
-          <p:cNvSpPr>
-            <a:spLocks xmlns:a="http://schemas.openxmlformats.org/drawingml/2006/main" noGrp="1"/>
-          </p:cNvSpPr>
-          <p:nvPr/>
-        </p:nvSpPr>
-        <p:spPr>
-          <a:xfrm xmlns:a="http://schemas.openxmlformats.org/drawingml/2006/main">
-            <a:off x="1000125" y="3019425"/>
-            <a:ext cx="476250" cy="419100"/>
+                <a16:creationId xmlns:a16="http://schemas.microsoft.com/office/drawing/2014/main" id="{F9953457-3A9A-4CC3-A06E-49A3FA2DE29F}"/>
+              </a:ext>
+            </a:extLst>
+          </p:cNvPr>
+          <p:cNvSpPr>
+            <a:spLocks xmlns:a="http://schemas.openxmlformats.org/drawingml/2006/main" noGrp="1"/>
+          </p:cNvSpPr>
+          <p:nvPr/>
+        </p:nvSpPr>
+        <p:spPr>
+          <a:xfrm xmlns:a="http://schemas.openxmlformats.org/drawingml/2006/main">
+            <a:off x="1162050" y="3076575"/>
+            <a:ext cx="400050" cy="400050"/>
           </a:xfrm>
           <a:prstGeom xmlns:a="http://schemas.openxmlformats.org/drawingml/2006/main" prst="rect">
             <a:avLst/>
@@ -8470,9 +8474,9 @@
           <a:lstStyle xmlns:a="http://schemas.openxmlformats.org/drawingml/2006/main"/>
           <a:p xmlns:a="http://schemas.openxmlformats.org/drawingml/2006/main">
             <a:pPr algn="ctr">
-              <a:defRPr sz="1350" b="1">
-                <a:solidFill>
-                  <a:srgbClr val="FFFFFF"/>
+              <a:defRPr sz="1125" b="1">
+                <a:solidFill>
+                  <a:srgbClr val="2C6E73"/>
                 </a:solidFill>
                 <a:latin typeface="Arial"/>
                 <a:ea typeface="Arial"/>
@@ -8480,9 +8484,9 @@
               </a:defRPr>
             </a:pPr>
             <a:r>
-              <a:rPr sz="1350" b="1">
-                <a:solidFill>
-                  <a:srgbClr val="FFFFFF"/>
+              <a:rPr sz="1125" b="1">
+                <a:solidFill>
+                  <a:srgbClr val="2C6E73"/>
                 </a:solidFill>
                 <a:latin typeface="Arial"/>
                 <a:ea typeface="Arial"/>
@@ -8498,19 +8502,19 @@
           <p:cNvPr id="16" name="">
             <a:extLst xmlns:a="http://schemas.openxmlformats.org/drawingml/2006/main">
               <a:ext uri="{FF2B5EF4-FFF2-40B4-BE49-F238E27FC236}">
-                <a16:creationId xmlns:a16="http://schemas.microsoft.com/office/drawing/2014/main" id="{53E86924-DFBD-4951-95BE-59E349A23A0F}"/>
-              </a:ext>
-            </a:extLst>
-          </p:cNvPr>
-          <p:cNvSpPr>
-            <a:spLocks xmlns:a="http://schemas.openxmlformats.org/drawingml/2006/main" noGrp="1"/>
-          </p:cNvSpPr>
-          <p:nvPr/>
-        </p:nvSpPr>
-        <p:spPr>
-          <a:xfrm xmlns:a="http://schemas.openxmlformats.org/drawingml/2006/main">
-            <a:off x="1714500" y="2924175"/>
-            <a:ext cx="9429750" cy="609600"/>
+                <a16:creationId xmlns:a16="http://schemas.microsoft.com/office/drawing/2014/main" id="{1BA24442-8D8B-4BCF-9617-4771270A5B04}"/>
+              </a:ext>
+            </a:extLst>
+          </p:cNvPr>
+          <p:cNvSpPr>
+            <a:spLocks xmlns:a="http://schemas.openxmlformats.org/drawingml/2006/main" noGrp="1"/>
+          </p:cNvSpPr>
+          <p:nvPr/>
+        </p:nvSpPr>
+        <p:spPr>
+          <a:xfrm xmlns:a="http://schemas.openxmlformats.org/drawingml/2006/main">
+            <a:off x="1714500" y="2990850"/>
+            <a:ext cx="9525000" cy="809625"/>
           </a:xfrm>
           <a:prstGeom xmlns:a="http://schemas.openxmlformats.org/drawingml/2006/main" prst="rect">
             <a:avLst/>
@@ -8527,7 +8531,7 @@
           <a:lstStyle xmlns:a="http://schemas.openxmlformats.org/drawingml/2006/main"/>
           <a:p xmlns:a="http://schemas.openxmlformats.org/drawingml/2006/main">
             <a:pPr algn="l">
-              <a:defRPr sz="1500" b="0">
+              <a:defRPr sz="1725" b="0">
                 <a:solidFill>
                   <a:srgbClr val="17253A"/>
                 </a:solidFill>
@@ -8537,7 +8541,7 @@
               </a:defRPr>
             </a:pPr>
             <a:r>
-              <a:rPr sz="1500" b="0">
+              <a:rPr sz="1725" b="0">
                 <a:solidFill>
                   <a:srgbClr val="17253A"/>
                 </a:solidFill>
@@ -8545,7 +8549,7 @@
                 <a:ea typeface="Arial"/>
                 <a:cs typeface="Arial"/>
               </a:rPr>
-              <a:t>Set up the method: Multiply numerators and denominators, cancelling common factors efficiently.</a:t>
+              <a:t>2/3 × 3/5</a:t>
             </a:r>
           </a:p>
         </p:txBody>
@@ -8555,28 +8559,30 @@
           <p:cNvPr id="17" name="">
             <a:extLst xmlns:a="http://schemas.openxmlformats.org/drawingml/2006/main">
               <a:ext uri="{FF2B5EF4-FFF2-40B4-BE49-F238E27FC236}">
-                <a16:creationId xmlns:a16="http://schemas.microsoft.com/office/drawing/2014/main" id="{F27AAA01-14F8-4EF2-BAF6-B065E0D47FAE}"/>
-              </a:ext>
-            </a:extLst>
-          </p:cNvPr>
-          <p:cNvSpPr>
-            <a:spLocks xmlns:a="http://schemas.openxmlformats.org/drawingml/2006/main" noGrp="1"/>
-          </p:cNvSpPr>
-          <p:nvPr/>
-        </p:nvSpPr>
-        <p:spPr>
-          <a:xfrm xmlns:a="http://schemas.openxmlformats.org/drawingml/2006/main">
-            <a:off x="1000125" y="3733800"/>
-            <a:ext cx="476250" cy="476250"/>
-          </a:xfrm>
-          <a:prstGeom xmlns:a="http://schemas.openxmlformats.org/drawingml/2006/main" prst="ellipse">
+                <a16:creationId xmlns:a16="http://schemas.microsoft.com/office/drawing/2014/main" id="{5CDE67E8-2B28-4F67-89A3-4149E96D0F7E}"/>
+              </a:ext>
+            </a:extLst>
+          </p:cNvPr>
+          <p:cNvSpPr>
+            <a:spLocks xmlns:a="http://schemas.openxmlformats.org/drawingml/2006/main" noGrp="1"/>
+          </p:cNvSpPr>
+          <p:nvPr/>
+        </p:nvSpPr>
+        <p:spPr>
+          <a:xfrm xmlns:a="http://schemas.openxmlformats.org/drawingml/2006/main">
+            <a:off x="1714500" y="3819525"/>
+            <a:ext cx="9334500" cy="9525"/>
+          </a:xfrm>
+          <a:prstGeom xmlns:a="http://schemas.openxmlformats.org/drawingml/2006/main" prst="rect">
             <a:avLst/>
           </a:prstGeom>
           <a:solidFill xmlns:a="http://schemas.openxmlformats.org/drawingml/2006/main">
-            <a:srgbClr val="2C6E73"/>
+            <a:srgbClr val="D9E0E6"/>
           </a:solidFill>
           <a:ln xmlns:a="http://schemas.openxmlformats.org/drawingml/2006/main" w="0">
-            <a:noFill/>
+            <a:solidFill>
+              <a:srgbClr val="D9E0E6"/>
+            </a:solidFill>
           </a:ln>
         </p:spPr>
       </p:sp>
@@ -8585,19 +8591,19 @@
           <p:cNvPr id="18" name="">
             <a:extLst xmlns:a="http://schemas.openxmlformats.org/drawingml/2006/main">
               <a:ext uri="{FF2B5EF4-FFF2-40B4-BE49-F238E27FC236}">
-                <a16:creationId xmlns:a16="http://schemas.microsoft.com/office/drawing/2014/main" id="{41A9F4C9-9F8A-468B-9006-F6716B676ECC}"/>
-              </a:ext>
-            </a:extLst>
-          </p:cNvPr>
-          <p:cNvSpPr>
-            <a:spLocks xmlns:a="http://schemas.openxmlformats.org/drawingml/2006/main" noGrp="1"/>
-          </p:cNvSpPr>
-          <p:nvPr/>
-        </p:nvSpPr>
-        <p:spPr>
-          <a:xfrm xmlns:a="http://schemas.openxmlformats.org/drawingml/2006/main">
-            <a:off x="1000125" y="3762375"/>
-            <a:ext cx="476250" cy="419100"/>
+                <a16:creationId xmlns:a16="http://schemas.microsoft.com/office/drawing/2014/main" id="{6871BBD4-51CB-421E-97AA-01ADE61BDC38}"/>
+              </a:ext>
+            </a:extLst>
+          </p:cNvPr>
+          <p:cNvSpPr>
+            <a:spLocks xmlns:a="http://schemas.openxmlformats.org/drawingml/2006/main" noGrp="1"/>
+          </p:cNvSpPr>
+          <p:nvPr/>
+        </p:nvSpPr>
+        <p:spPr>
+          <a:xfrm xmlns:a="http://schemas.openxmlformats.org/drawingml/2006/main">
+            <a:off x="1162050" y="3952875"/>
+            <a:ext cx="400050" cy="400050"/>
           </a:xfrm>
           <a:prstGeom xmlns:a="http://schemas.openxmlformats.org/drawingml/2006/main" prst="rect">
             <a:avLst/>
@@ -8614,9 +8620,9 @@
           <a:lstStyle xmlns:a="http://schemas.openxmlformats.org/drawingml/2006/main"/>
           <a:p xmlns:a="http://schemas.openxmlformats.org/drawingml/2006/main">
             <a:pPr algn="ctr">
-              <a:defRPr sz="1350" b="1">
-                <a:solidFill>
-                  <a:srgbClr val="FFFFFF"/>
+              <a:defRPr sz="1125" b="1">
+                <a:solidFill>
+                  <a:srgbClr val="2C6E73"/>
                 </a:solidFill>
                 <a:latin typeface="Arial"/>
                 <a:ea typeface="Arial"/>
@@ -8624,9 +8630,9 @@
               </a:defRPr>
             </a:pPr>
             <a:r>
-              <a:rPr sz="1350" b="1">
-                <a:solidFill>
-                  <a:srgbClr val="FFFFFF"/>
+              <a:rPr sz="1125" b="1">
+                <a:solidFill>
+                  <a:srgbClr val="2C6E73"/>
                 </a:solidFill>
                 <a:latin typeface="Arial"/>
                 <a:ea typeface="Arial"/>
@@ -8642,19 +8648,19 @@
           <p:cNvPr id="19" name="">
             <a:extLst xmlns:a="http://schemas.openxmlformats.org/drawingml/2006/main">
               <a:ext uri="{FF2B5EF4-FFF2-40B4-BE49-F238E27FC236}">
-                <a16:creationId xmlns:a16="http://schemas.microsoft.com/office/drawing/2014/main" id="{5C41924F-0023-4CCF-9F0C-D6B69B1E4DA4}"/>
-              </a:ext>
-            </a:extLst>
-          </p:cNvPr>
-          <p:cNvSpPr>
-            <a:spLocks xmlns:a="http://schemas.openxmlformats.org/drawingml/2006/main" noGrp="1"/>
-          </p:cNvSpPr>
-          <p:nvPr/>
-        </p:nvSpPr>
-        <p:spPr>
-          <a:xfrm xmlns:a="http://schemas.openxmlformats.org/drawingml/2006/main">
-            <a:off x="1714500" y="3667125"/>
-            <a:ext cx="9429750" cy="609600"/>
+                <a16:creationId xmlns:a16="http://schemas.microsoft.com/office/drawing/2014/main" id="{89EFA285-87FB-4B17-88A0-EAD4DB1E7DCB}"/>
+              </a:ext>
+            </a:extLst>
+          </p:cNvPr>
+          <p:cNvSpPr>
+            <a:spLocks xmlns:a="http://schemas.openxmlformats.org/drawingml/2006/main" noGrp="1"/>
+          </p:cNvSpPr>
+          <p:nvPr/>
+        </p:nvSpPr>
+        <p:spPr>
+          <a:xfrm xmlns:a="http://schemas.openxmlformats.org/drawingml/2006/main">
+            <a:off x="1714500" y="3867150"/>
+            <a:ext cx="9525000" cy="809625"/>
           </a:xfrm>
           <a:prstGeom xmlns:a="http://schemas.openxmlformats.org/drawingml/2006/main" prst="rect">
             <a:avLst/>
@@ -8671,7 +8677,7 @@
           <a:lstStyle xmlns:a="http://schemas.openxmlformats.org/drawingml/2006/main"/>
           <a:p xmlns:a="http://schemas.openxmlformats.org/drawingml/2006/main">
             <a:pPr algn="l">
-              <a:defRPr sz="1500" b="0">
+              <a:defRPr sz="1725" b="0">
                 <a:solidFill>
                   <a:srgbClr val="17253A"/>
                 </a:solidFill>
@@ -8681,7 +8687,7 @@
               </a:defRPr>
             </a:pPr>
             <a:r>
-              <a:rPr sz="1500" b="0">
+              <a:rPr sz="1725" b="0">
                 <a:solidFill>
                   <a:srgbClr val="17253A"/>
                 </a:solidFill>
@@ -8689,7 +8695,7 @@
                 <a:ea typeface="Arial"/>
                 <a:cs typeface="Arial"/>
               </a:rPr>
-              <a:t>Complete the calculation: 2/5 m.</a:t>
+              <a:t>Cancel the common factor 3</a:t>
             </a:r>
           </a:p>
         </p:txBody>
@@ -8699,28 +8705,30 @@
           <p:cNvPr id="20" name="">
             <a:extLst xmlns:a="http://schemas.openxmlformats.org/drawingml/2006/main">
               <a:ext uri="{FF2B5EF4-FFF2-40B4-BE49-F238E27FC236}">
-                <a16:creationId xmlns:a16="http://schemas.microsoft.com/office/drawing/2014/main" id="{57936172-31EE-4CF1-AAB6-D82F61C1DE32}"/>
-              </a:ext>
-            </a:extLst>
-          </p:cNvPr>
-          <p:cNvSpPr>
-            <a:spLocks xmlns:a="http://schemas.openxmlformats.org/drawingml/2006/main" noGrp="1"/>
-          </p:cNvSpPr>
-          <p:nvPr/>
-        </p:nvSpPr>
-        <p:spPr>
-          <a:xfrm xmlns:a="http://schemas.openxmlformats.org/drawingml/2006/main">
-            <a:off x="1000125" y="4476750"/>
-            <a:ext cx="476250" cy="476250"/>
-          </a:xfrm>
-          <a:prstGeom xmlns:a="http://schemas.openxmlformats.org/drawingml/2006/main" prst="ellipse">
+                <a16:creationId xmlns:a16="http://schemas.microsoft.com/office/drawing/2014/main" id="{C33F8887-D9A0-4ED5-AFF6-00AE312BA80E}"/>
+              </a:ext>
+            </a:extLst>
+          </p:cNvPr>
+          <p:cNvSpPr>
+            <a:spLocks xmlns:a="http://schemas.openxmlformats.org/drawingml/2006/main" noGrp="1"/>
+          </p:cNvSpPr>
+          <p:nvPr/>
+        </p:nvSpPr>
+        <p:spPr>
+          <a:xfrm xmlns:a="http://schemas.openxmlformats.org/drawingml/2006/main">
+            <a:off x="1714500" y="4695825"/>
+            <a:ext cx="9334500" cy="9525"/>
+          </a:xfrm>
+          <a:prstGeom xmlns:a="http://schemas.openxmlformats.org/drawingml/2006/main" prst="rect">
             <a:avLst/>
           </a:prstGeom>
           <a:solidFill xmlns:a="http://schemas.openxmlformats.org/drawingml/2006/main">
-            <a:srgbClr val="2C6E73"/>
+            <a:srgbClr val="D9E0E6"/>
           </a:solidFill>
           <a:ln xmlns:a="http://schemas.openxmlformats.org/drawingml/2006/main" w="0">
-            <a:noFill/>
+            <a:solidFill>
+              <a:srgbClr val="D9E0E6"/>
+            </a:solidFill>
           </a:ln>
         </p:spPr>
       </p:sp>
@@ -8729,19 +8737,19 @@
           <p:cNvPr id="21" name="">
             <a:extLst xmlns:a="http://schemas.openxmlformats.org/drawingml/2006/main">
               <a:ext uri="{FF2B5EF4-FFF2-40B4-BE49-F238E27FC236}">
-                <a16:creationId xmlns:a16="http://schemas.microsoft.com/office/drawing/2014/main" id="{82FD5ABE-C3B5-4723-8B08-B5394FBB5344}"/>
-              </a:ext>
-            </a:extLst>
-          </p:cNvPr>
-          <p:cNvSpPr>
-            <a:spLocks xmlns:a="http://schemas.openxmlformats.org/drawingml/2006/main" noGrp="1"/>
-          </p:cNvSpPr>
-          <p:nvPr/>
-        </p:nvSpPr>
-        <p:spPr>
-          <a:xfrm xmlns:a="http://schemas.openxmlformats.org/drawingml/2006/main">
-            <a:off x="1000125" y="4505325"/>
-            <a:ext cx="476250" cy="419100"/>
+                <a16:creationId xmlns:a16="http://schemas.microsoft.com/office/drawing/2014/main" id="{B425021D-88C0-4B9D-BA29-BCE5CE68B4A1}"/>
+              </a:ext>
+            </a:extLst>
+          </p:cNvPr>
+          <p:cNvSpPr>
+            <a:spLocks xmlns:a="http://schemas.openxmlformats.org/drawingml/2006/main" noGrp="1"/>
+          </p:cNvSpPr>
+          <p:nvPr/>
+        </p:nvSpPr>
+        <p:spPr>
+          <a:xfrm xmlns:a="http://schemas.openxmlformats.org/drawingml/2006/main">
+            <a:off x="1162050" y="4829175"/>
+            <a:ext cx="400050" cy="400050"/>
           </a:xfrm>
           <a:prstGeom xmlns:a="http://schemas.openxmlformats.org/drawingml/2006/main" prst="rect">
             <a:avLst/>
@@ -8758,9 +8766,9 @@
           <a:lstStyle xmlns:a="http://schemas.openxmlformats.org/drawingml/2006/main"/>
           <a:p xmlns:a="http://schemas.openxmlformats.org/drawingml/2006/main">
             <a:pPr algn="ctr">
-              <a:defRPr sz="1350" b="1">
-                <a:solidFill>
-                  <a:srgbClr val="FFFFFF"/>
+              <a:defRPr sz="1125" b="1">
+                <a:solidFill>
+                  <a:srgbClr val="2F785D"/>
                 </a:solidFill>
                 <a:latin typeface="Arial"/>
                 <a:ea typeface="Arial"/>
@@ -8768,9 +8776,9 @@
               </a:defRPr>
             </a:pPr>
             <a:r>
-              <a:rPr sz="1350" b="1">
-                <a:solidFill>
-                  <a:srgbClr val="FFFFFF"/>
+              <a:rPr sz="1125" b="1">
+                <a:solidFill>
+                  <a:srgbClr val="2F785D"/>
                 </a:solidFill>
                 <a:latin typeface="Arial"/>
                 <a:ea typeface="Arial"/>
@@ -8786,19 +8794,19 @@
           <p:cNvPr id="22" name="">
             <a:extLst xmlns:a="http://schemas.openxmlformats.org/drawingml/2006/main">
               <a:ext uri="{FF2B5EF4-FFF2-40B4-BE49-F238E27FC236}">
-                <a16:creationId xmlns:a16="http://schemas.microsoft.com/office/drawing/2014/main" id="{83041F9D-79B3-42ED-B735-2464057CF1B8}"/>
-              </a:ext>
-            </a:extLst>
-          </p:cNvPr>
-          <p:cNvSpPr>
-            <a:spLocks xmlns:a="http://schemas.openxmlformats.org/drawingml/2006/main" noGrp="1"/>
-          </p:cNvSpPr>
-          <p:nvPr/>
-        </p:nvSpPr>
-        <p:spPr>
-          <a:xfrm xmlns:a="http://schemas.openxmlformats.org/drawingml/2006/main">
-            <a:off x="1714500" y="4410075"/>
-            <a:ext cx="9429750" cy="609600"/>
+                <a16:creationId xmlns:a16="http://schemas.microsoft.com/office/drawing/2014/main" id="{B0D2C1F3-BB2D-4920-B077-F0D9B4C8795C}"/>
+              </a:ext>
+            </a:extLst>
+          </p:cNvPr>
+          <p:cNvSpPr>
+            <a:spLocks xmlns:a="http://schemas.openxmlformats.org/drawingml/2006/main" noGrp="1"/>
+          </p:cNvSpPr>
+          <p:nvPr/>
+        </p:nvSpPr>
+        <p:spPr>
+          <a:xfrm xmlns:a="http://schemas.openxmlformats.org/drawingml/2006/main">
+            <a:off x="1714500" y="4743450"/>
+            <a:ext cx="9525000" cy="809625"/>
           </a:xfrm>
           <a:prstGeom xmlns:a="http://schemas.openxmlformats.org/drawingml/2006/main" prst="rect">
             <a:avLst/>
@@ -8815,7 +8823,7 @@
           <a:lstStyle xmlns:a="http://schemas.openxmlformats.org/drawingml/2006/main"/>
           <a:p xmlns:a="http://schemas.openxmlformats.org/drawingml/2006/main">
             <a:pPr algn="l">
-              <a:defRPr sz="1500" b="1">
+              <a:defRPr sz="1725" b="1">
                 <a:solidFill>
                   <a:srgbClr val="2F785D"/>
                 </a:solidFill>
@@ -8825,7 +8833,7 @@
               </a:defRPr>
             </a:pPr>
             <a:r>
-              <a:rPr sz="1500" b="1">
+              <a:rPr sz="1725" b="1">
                 <a:solidFill>
                   <a:srgbClr val="2F785D"/>
                 </a:solidFill>
@@ -8833,7 +8841,7 @@
                 <a:ea typeface="Arial"/>
                 <a:cs typeface="Arial"/>
               </a:rPr>
-              <a:t>Check the result: Simplify the product and check its size.</a:t>
+              <a:t>2/5 m</a:t>
             </a:r>
           </a:p>
         </p:txBody>
@@ -8841,7 +8849,7 @@
     </p:spTree>
     <p:extLst>
       <p:ext uri="{BB962C8B-B14F-4D97-AF65-F5344CB8AC3E}">
-        <p14:creationId xmlns:p14="http://schemas.microsoft.com/office/powerpoint/2010/main" val="269808666"/>
+        <p14:creationId xmlns:p14="http://schemas.microsoft.com/office/powerpoint/2010/main" val="565584638"/>
       </p:ext>
     </p:extLst>
   </p:cSld>
@@ -9134,7 +9142,7 @@
           <p:cNvPr id="15" name="">
             <a:extLst xmlns:a="http://schemas.openxmlformats.org/drawingml/2006/main">
               <a:ext uri="{FF2B5EF4-FFF2-40B4-BE49-F238E27FC236}">
-                <a16:creationId xmlns:a16="http://schemas.microsoft.com/office/drawing/2014/main" id="{DE25226E-00A2-4A87-B8E9-D9E3416E4524}"/>
+                <a16:creationId xmlns:a16="http://schemas.microsoft.com/office/drawing/2014/main" id="{6A963C64-DF1F-4493-8498-B159A5F1D042}"/>
               </a:ext>
             </a:extLst>
           </p:cNvPr>
@@ -9166,7 +9174,7 @@
           <p:cNvPr id="2" name="">
             <a:extLst xmlns:a="http://schemas.openxmlformats.org/drawingml/2006/main">
               <a:ext uri="{FF2B5EF4-FFF2-40B4-BE49-F238E27FC236}">
-                <a16:creationId xmlns:a16="http://schemas.microsoft.com/office/drawing/2014/main" id="{12D3948C-5C5E-44C9-987E-8BF81CF63359}"/>
+                <a16:creationId xmlns:a16="http://schemas.microsoft.com/office/drawing/2014/main" id="{0123A619-5FCD-4AD8-B187-7ECB77508A6E}"/>
               </a:ext>
             </a:extLst>
           </p:cNvPr>
@@ -9223,7 +9231,7 @@
           <p:cNvPr id="3" name="">
             <a:extLst xmlns:a="http://schemas.openxmlformats.org/drawingml/2006/main">
               <a:ext uri="{FF2B5EF4-FFF2-40B4-BE49-F238E27FC236}">
-                <a16:creationId xmlns:a16="http://schemas.microsoft.com/office/drawing/2014/main" id="{4871B7F7-BA1F-4838-97C1-1916D74896A6}"/>
+                <a16:creationId xmlns:a16="http://schemas.microsoft.com/office/drawing/2014/main" id="{0759D2A1-50A8-4432-AD94-216FA5CBF0C1}"/>
               </a:ext>
             </a:extLst>
           </p:cNvPr>
@@ -9255,7 +9263,7 @@
           <p:cNvPr id="4" name="">
             <a:extLst xmlns:a="http://schemas.openxmlformats.org/drawingml/2006/main">
               <a:ext uri="{FF2B5EF4-FFF2-40B4-BE49-F238E27FC236}">
-                <a16:creationId xmlns:a16="http://schemas.microsoft.com/office/drawing/2014/main" id="{43ADF994-CA19-4B25-9D9C-678D9D899903}"/>
+                <a16:creationId xmlns:a16="http://schemas.microsoft.com/office/drawing/2014/main" id="{AA5A9314-F230-4A25-9556-F111C8B0A161}"/>
               </a:ext>
             </a:extLst>
           </p:cNvPr>
@@ -9312,7 +9320,7 @@
           <p:cNvPr id="5" name="">
             <a:extLst xmlns:a="http://schemas.openxmlformats.org/drawingml/2006/main">
               <a:ext uri="{FF2B5EF4-FFF2-40B4-BE49-F238E27FC236}">
-                <a16:creationId xmlns:a16="http://schemas.microsoft.com/office/drawing/2014/main" id="{C4767985-9A4E-431E-A62C-1A2AEA704B0E}"/>
+                <a16:creationId xmlns:a16="http://schemas.microsoft.com/office/drawing/2014/main" id="{7FC10D01-489C-46EC-8649-514C02387B68}"/>
               </a:ext>
             </a:extLst>
           </p:cNvPr>
@@ -9369,7 +9377,7 @@
           <p:cNvPr id="6" name="">
             <a:extLst xmlns:a="http://schemas.openxmlformats.org/drawingml/2006/main">
               <a:ext uri="{FF2B5EF4-FFF2-40B4-BE49-F238E27FC236}">
-                <a16:creationId xmlns:a16="http://schemas.microsoft.com/office/drawing/2014/main" id="{5269BB66-196B-4EED-A39D-033A90FFE44B}"/>
+                <a16:creationId xmlns:a16="http://schemas.microsoft.com/office/drawing/2014/main" id="{87DE2256-C15B-48EC-A679-2C6FB2FCA3AC}"/>
               </a:ext>
             </a:extLst>
           </p:cNvPr>
@@ -9426,7 +9434,7 @@
           <p:cNvPr id="7" name="">
             <a:extLst xmlns:a="http://schemas.openxmlformats.org/drawingml/2006/main">
               <a:ext uri="{FF2B5EF4-FFF2-40B4-BE49-F238E27FC236}">
-                <a16:creationId xmlns:a16="http://schemas.microsoft.com/office/drawing/2014/main" id="{8F8527AA-F8B2-4C78-9D51-9AF5EBB434A3}"/>
+                <a16:creationId xmlns:a16="http://schemas.microsoft.com/office/drawing/2014/main" id="{9D884E81-2241-40CC-8713-E673C1024DCA}"/>
               </a:ext>
             </a:extLst>
           </p:cNvPr>
@@ -9458,7 +9466,7 @@
           <p:cNvPr id="8" name="">
             <a:extLst xmlns:a="http://schemas.openxmlformats.org/drawingml/2006/main">
               <a:ext uri="{FF2B5EF4-FFF2-40B4-BE49-F238E27FC236}">
-                <a16:creationId xmlns:a16="http://schemas.microsoft.com/office/drawing/2014/main" id="{52D035FF-676C-45F7-BD8A-0DDD16B8027C}"/>
+                <a16:creationId xmlns:a16="http://schemas.microsoft.com/office/drawing/2014/main" id="{5AF024E6-13F3-47BA-8629-D122137DE63E}"/>
               </a:ext>
             </a:extLst>
           </p:cNvPr>
@@ -9515,7 +9523,7 @@
           <p:cNvPr id="9" name="">
             <a:extLst xmlns:a="http://schemas.openxmlformats.org/drawingml/2006/main">
               <a:ext uri="{FF2B5EF4-FFF2-40B4-BE49-F238E27FC236}">
-                <a16:creationId xmlns:a16="http://schemas.microsoft.com/office/drawing/2014/main" id="{40A7FFC7-0D89-48DD-9491-86D4293E651E}"/>
+                <a16:creationId xmlns:a16="http://schemas.microsoft.com/office/drawing/2014/main" id="{B9A1763E-A79B-4688-903B-FBA565C511E8}"/>
               </a:ext>
             </a:extLst>
           </p:cNvPr>
@@ -9572,7 +9580,7 @@
           <p:cNvPr id="10" name="">
             <a:extLst xmlns:a="http://schemas.openxmlformats.org/drawingml/2006/main">
               <a:ext uri="{FF2B5EF4-FFF2-40B4-BE49-F238E27FC236}">
-                <a16:creationId xmlns:a16="http://schemas.microsoft.com/office/drawing/2014/main" id="{2596E75F-5E4D-4924-B0C6-B69557C0B0F3}"/>
+                <a16:creationId xmlns:a16="http://schemas.microsoft.com/office/drawing/2014/main" id="{1480292D-96CC-4587-938C-4709FF188BDD}"/>
               </a:ext>
             </a:extLst>
           </p:cNvPr>
@@ -9629,7 +9637,7 @@
           <p:cNvPr id="11" name="">
             <a:extLst xmlns:a="http://schemas.openxmlformats.org/drawingml/2006/main">
               <a:ext uri="{FF2B5EF4-FFF2-40B4-BE49-F238E27FC236}">
-                <a16:creationId xmlns:a16="http://schemas.microsoft.com/office/drawing/2014/main" id="{1475772E-FB9F-474F-874B-662F727F21CD}"/>
+                <a16:creationId xmlns:a16="http://schemas.microsoft.com/office/drawing/2014/main" id="{62F3650B-FD9A-4B2F-956D-95B1FE35B234}"/>
               </a:ext>
             </a:extLst>
           </p:cNvPr>
@@ -9686,7 +9694,7 @@
           <p:cNvPr id="12" name="">
             <a:extLst xmlns:a="http://schemas.openxmlformats.org/drawingml/2006/main">
               <a:ext uri="{FF2B5EF4-FFF2-40B4-BE49-F238E27FC236}">
-                <a16:creationId xmlns:a16="http://schemas.microsoft.com/office/drawing/2014/main" id="{3FB1C1B1-A209-4DD0-9B82-DC05EDC536D5}"/>
+                <a16:creationId xmlns:a16="http://schemas.microsoft.com/office/drawing/2014/main" id="{EDAB1793-A286-4798-B0CB-71073C2646CB}"/>
               </a:ext>
             </a:extLst>
           </p:cNvPr>
@@ -9718,7 +9726,7 @@
           <p:cNvPr id="13" name="">
             <a:extLst xmlns:a="http://schemas.openxmlformats.org/drawingml/2006/main">
               <a:ext uri="{FF2B5EF4-FFF2-40B4-BE49-F238E27FC236}">
-                <a16:creationId xmlns:a16="http://schemas.microsoft.com/office/drawing/2014/main" id="{AC0BC435-3833-40DB-89E1-4485FA64A236}"/>
+                <a16:creationId xmlns:a16="http://schemas.microsoft.com/office/drawing/2014/main" id="{01A168E6-17D2-4A8E-A476-0A13EC05B13D}"/>
               </a:ext>
             </a:extLst>
           </p:cNvPr>
@@ -9775,7 +9783,7 @@
           <p:cNvPr id="14" name="">
             <a:extLst xmlns:a="http://schemas.openxmlformats.org/drawingml/2006/main">
               <a:ext uri="{FF2B5EF4-FFF2-40B4-BE49-F238E27FC236}">
-                <a16:creationId xmlns:a16="http://schemas.microsoft.com/office/drawing/2014/main" id="{0E8DB8D9-88AC-4595-89E1-CDF2A33D7C3E}"/>
+                <a16:creationId xmlns:a16="http://schemas.microsoft.com/office/drawing/2014/main" id="{D6EF3FA4-A684-4A19-9B75-4497BD45B10A}"/>
               </a:ext>
             </a:extLst>
           </p:cNvPr>
@@ -9830,7 +9838,7 @@
     </p:spTree>
     <p:extLst>
       <p:ext uri="{BB962C8B-B14F-4D97-AF65-F5344CB8AC3E}">
-        <p14:creationId xmlns:p14="http://schemas.microsoft.com/office/powerpoint/2010/main" val="1715192046"/>
+        <p14:creationId xmlns:p14="http://schemas.microsoft.com/office/powerpoint/2010/main" val="523601458"/>
       </p:ext>
     </p:extLst>
   </p:cSld>
@@ -10031,7 +10039,7 @@
           <p:cNvPr id="16" name="">
             <a:extLst xmlns:a="http://schemas.openxmlformats.org/drawingml/2006/main">
               <a:ext uri="{FF2B5EF4-FFF2-40B4-BE49-F238E27FC236}">
-                <a16:creationId xmlns:a16="http://schemas.microsoft.com/office/drawing/2014/main" id="{47DB92AC-59A5-484F-A098-B8FE93003C57}"/>
+                <a16:creationId xmlns:a16="http://schemas.microsoft.com/office/drawing/2014/main" id="{13D9F4AD-E15F-40DB-B372-728253ED86BB}"/>
               </a:ext>
             </a:extLst>
           </p:cNvPr>
@@ -10063,7 +10071,7 @@
           <p:cNvPr id="2" name="">
             <a:extLst xmlns:a="http://schemas.openxmlformats.org/drawingml/2006/main">
               <a:ext uri="{FF2B5EF4-FFF2-40B4-BE49-F238E27FC236}">
-                <a16:creationId xmlns:a16="http://schemas.microsoft.com/office/drawing/2014/main" id="{1E6BAACD-1CAD-454A-AA7B-0C4F27989053}"/>
+                <a16:creationId xmlns:a16="http://schemas.microsoft.com/office/drawing/2014/main" id="{977B53E6-CCB7-47AC-B060-8A28AA1435A0}"/>
               </a:ext>
             </a:extLst>
           </p:cNvPr>
@@ -10120,7 +10128,7 @@
           <p:cNvPr id="3" name="">
             <a:extLst xmlns:a="http://schemas.openxmlformats.org/drawingml/2006/main">
               <a:ext uri="{FF2B5EF4-FFF2-40B4-BE49-F238E27FC236}">
-                <a16:creationId xmlns:a16="http://schemas.microsoft.com/office/drawing/2014/main" id="{C01CADE9-E962-4670-8070-C38C29CEC58A}"/>
+                <a16:creationId xmlns:a16="http://schemas.microsoft.com/office/drawing/2014/main" id="{0326C2F3-EA68-4EB7-BFCC-B5A74541F1DD}"/>
               </a:ext>
             </a:extLst>
           </p:cNvPr>
@@ -10152,7 +10160,7 @@
           <p:cNvPr id="4" name="">
             <a:extLst xmlns:a="http://schemas.openxmlformats.org/drawingml/2006/main">
               <a:ext uri="{FF2B5EF4-FFF2-40B4-BE49-F238E27FC236}">
-                <a16:creationId xmlns:a16="http://schemas.microsoft.com/office/drawing/2014/main" id="{B89A98E7-6355-4E2C-B3EA-77C50C858EDF}"/>
+                <a16:creationId xmlns:a16="http://schemas.microsoft.com/office/drawing/2014/main" id="{009F9C30-B56D-43B5-A44C-E469CE8FC2D7}"/>
               </a:ext>
             </a:extLst>
           </p:cNvPr>
@@ -10209,7 +10217,7 @@
           <p:cNvPr id="5" name="">
             <a:extLst xmlns:a="http://schemas.openxmlformats.org/drawingml/2006/main">
               <a:ext uri="{FF2B5EF4-FFF2-40B4-BE49-F238E27FC236}">
-                <a16:creationId xmlns:a16="http://schemas.microsoft.com/office/drawing/2014/main" id="{81126BFC-4525-4B1F-8789-FE2921AEB5F1}"/>
+                <a16:creationId xmlns:a16="http://schemas.microsoft.com/office/drawing/2014/main" id="{6A43E21E-F4BA-4835-A761-E8FFF252C574}"/>
               </a:ext>
             </a:extLst>
           </p:cNvPr>
@@ -10266,7 +10274,7 @@
           <p:cNvPr id="6" name="">
             <a:extLst xmlns:a="http://schemas.openxmlformats.org/drawingml/2006/main">
               <a:ext uri="{FF2B5EF4-FFF2-40B4-BE49-F238E27FC236}">
-                <a16:creationId xmlns:a16="http://schemas.microsoft.com/office/drawing/2014/main" id="{8931B324-6C5D-426D-AB3A-068426C4F35C}"/>
+                <a16:creationId xmlns:a16="http://schemas.microsoft.com/office/drawing/2014/main" id="{7C29E97C-EE6F-4458-82C1-CA9208E82D62}"/>
               </a:ext>
             </a:extLst>
           </p:cNvPr>
@@ -10323,7 +10331,7 @@
           <p:cNvPr id="7" name="">
             <a:extLst xmlns:a="http://schemas.openxmlformats.org/drawingml/2006/main">
               <a:ext uri="{FF2B5EF4-FFF2-40B4-BE49-F238E27FC236}">
-                <a16:creationId xmlns:a16="http://schemas.microsoft.com/office/drawing/2014/main" id="{073260B4-7FB3-405C-B0E6-755945E81308}"/>
+                <a16:creationId xmlns:a16="http://schemas.microsoft.com/office/drawing/2014/main" id="{917F50B5-DF2C-41F3-82CA-CFFE48AEAEDA}"/>
               </a:ext>
             </a:extLst>
           </p:cNvPr>
@@ -10355,7 +10363,7 @@
           <p:cNvPr id="8" name="">
             <a:extLst xmlns:a="http://schemas.openxmlformats.org/drawingml/2006/main">
               <a:ext uri="{FF2B5EF4-FFF2-40B4-BE49-F238E27FC236}">
-                <a16:creationId xmlns:a16="http://schemas.microsoft.com/office/drawing/2014/main" id="{9DB2BA54-86CF-4BC2-9BD4-C43766D7EBC7}"/>
+                <a16:creationId xmlns:a16="http://schemas.microsoft.com/office/drawing/2014/main" id="{8C072BE0-8F03-46A5-AB48-B5573BE85DC9}"/>
               </a:ext>
             </a:extLst>
           </p:cNvPr>
@@ -10412,7 +10420,7 @@
           <p:cNvPr id="9" name="">
             <a:extLst xmlns:a="http://schemas.openxmlformats.org/drawingml/2006/main">
               <a:ext uri="{FF2B5EF4-FFF2-40B4-BE49-F238E27FC236}">
-                <a16:creationId xmlns:a16="http://schemas.microsoft.com/office/drawing/2014/main" id="{69ACDFBD-FD14-400D-9BC5-4B32B5789539}"/>
+                <a16:creationId xmlns:a16="http://schemas.microsoft.com/office/drawing/2014/main" id="{065C8CED-96C1-46A7-A11D-D56F74F4CC66}"/>
               </a:ext>
             </a:extLst>
           </p:cNvPr>
@@ -10469,7 +10477,7 @@
           <p:cNvPr id="10" name="">
             <a:extLst xmlns:a="http://schemas.openxmlformats.org/drawingml/2006/main">
               <a:ext uri="{FF2B5EF4-FFF2-40B4-BE49-F238E27FC236}">
-                <a16:creationId xmlns:a16="http://schemas.microsoft.com/office/drawing/2014/main" id="{3677B0E1-8CA0-459E-AA1D-DFF13F43792D}"/>
+                <a16:creationId xmlns:a16="http://schemas.microsoft.com/office/drawing/2014/main" id="{B31A4BD0-E0BD-4701-BC6E-F1093B57A3CC}"/>
               </a:ext>
             </a:extLst>
           </p:cNvPr>
@@ -10526,7 +10534,7 @@
           <p:cNvPr id="11" name="">
             <a:extLst xmlns:a="http://schemas.openxmlformats.org/drawingml/2006/main">
               <a:ext uri="{FF2B5EF4-FFF2-40B4-BE49-F238E27FC236}">
-                <a16:creationId xmlns:a16="http://schemas.microsoft.com/office/drawing/2014/main" id="{34641800-FDE2-4A64-A4F1-AAB912ED8FD3}"/>
+                <a16:creationId xmlns:a16="http://schemas.microsoft.com/office/drawing/2014/main" id="{8B9782DB-5DCE-4411-97A1-EAF9F7207CBF}"/>
               </a:ext>
             </a:extLst>
           </p:cNvPr>
@@ -10583,7 +10591,7 @@
           <p:cNvPr id="12" name="">
             <a:extLst xmlns:a="http://schemas.openxmlformats.org/drawingml/2006/main">
               <a:ext uri="{FF2B5EF4-FFF2-40B4-BE49-F238E27FC236}">
-                <a16:creationId xmlns:a16="http://schemas.microsoft.com/office/drawing/2014/main" id="{CEB5E922-C269-4F10-88BD-6AE028222090}"/>
+                <a16:creationId xmlns:a16="http://schemas.microsoft.com/office/drawing/2014/main" id="{660ADEDD-30F8-4BF2-B257-494C76AF6B68}"/>
               </a:ext>
             </a:extLst>
           </p:cNvPr>
@@ -10640,7 +10648,7 @@
           <p:cNvPr id="13" name="">
             <a:extLst xmlns:a="http://schemas.openxmlformats.org/drawingml/2006/main">
               <a:ext uri="{FF2B5EF4-FFF2-40B4-BE49-F238E27FC236}">
-                <a16:creationId xmlns:a16="http://schemas.microsoft.com/office/drawing/2014/main" id="{C2026E95-D7FF-4F1F-8646-D4E7D3852079}"/>
+                <a16:creationId xmlns:a16="http://schemas.microsoft.com/office/drawing/2014/main" id="{F2FDEF5F-9301-4E7D-B1E4-39EA403A03F2}"/>
               </a:ext>
             </a:extLst>
           </p:cNvPr>
@@ -10697,7 +10705,7 @@
           <p:cNvPr id="14" name="">
             <a:extLst xmlns:a="http://schemas.openxmlformats.org/drawingml/2006/main">
               <a:ext uri="{FF2B5EF4-FFF2-40B4-BE49-F238E27FC236}">
-                <a16:creationId xmlns:a16="http://schemas.microsoft.com/office/drawing/2014/main" id="{B0678CE2-36E5-4FF7-AC59-791186FF45E1}"/>
+                <a16:creationId xmlns:a16="http://schemas.microsoft.com/office/drawing/2014/main" id="{9F4E5DDD-9762-4241-B43D-7B03552C9269}"/>
               </a:ext>
             </a:extLst>
           </p:cNvPr>
@@ -10754,7 +10762,7 @@
           <p:cNvPr id="15" name="">
             <a:extLst xmlns:a="http://schemas.openxmlformats.org/drawingml/2006/main">
               <a:ext uri="{FF2B5EF4-FFF2-40B4-BE49-F238E27FC236}">
-                <a16:creationId xmlns:a16="http://schemas.microsoft.com/office/drawing/2014/main" id="{160EAEBA-3070-4E0C-ACCC-EF2DA55F21DB}"/>
+                <a16:creationId xmlns:a16="http://schemas.microsoft.com/office/drawing/2014/main" id="{3662FFBC-04F1-4202-B95E-DC55D9E1AB2E}"/>
               </a:ext>
             </a:extLst>
           </p:cNvPr>
@@ -10809,7 +10817,7 @@
     </p:spTree>
     <p:extLst>
       <p:ext uri="{BB962C8B-B14F-4D97-AF65-F5344CB8AC3E}">
-        <p14:creationId xmlns:p14="http://schemas.microsoft.com/office/powerpoint/2010/main" val="1616032300"/>
+        <p14:creationId xmlns:p14="http://schemas.microsoft.com/office/powerpoint/2010/main" val="1625870012"/>
       </p:ext>
     </p:extLst>
   </p:cSld>
@@ -10964,7 +10972,7 @@
           <p:cNvPr id="16" name="">
             <a:extLst xmlns:a="http://schemas.openxmlformats.org/drawingml/2006/main">
               <a:ext uri="{FF2B5EF4-FFF2-40B4-BE49-F238E27FC236}">
-                <a16:creationId xmlns:a16="http://schemas.microsoft.com/office/drawing/2014/main" id="{3DD77DB9-7F6D-4702-A7AA-9B9269982081}"/>
+                <a16:creationId xmlns:a16="http://schemas.microsoft.com/office/drawing/2014/main" id="{52AD97B9-6A96-49A5-9B2C-11A9917034AB}"/>
               </a:ext>
             </a:extLst>
           </p:cNvPr>
@@ -10996,7 +11004,7 @@
           <p:cNvPr id="2" name="">
             <a:extLst xmlns:a="http://schemas.openxmlformats.org/drawingml/2006/main">
               <a:ext uri="{FF2B5EF4-FFF2-40B4-BE49-F238E27FC236}">
-                <a16:creationId xmlns:a16="http://schemas.microsoft.com/office/drawing/2014/main" id="{58392CEF-5CD2-40D5-BD67-70731BB8DDAD}"/>
+                <a16:creationId xmlns:a16="http://schemas.microsoft.com/office/drawing/2014/main" id="{FB596DE3-E278-4DA9-8D73-E0DC7665F3E1}"/>
               </a:ext>
             </a:extLst>
           </p:cNvPr>
@@ -11053,7 +11061,7 @@
           <p:cNvPr id="3" name="">
             <a:extLst xmlns:a="http://schemas.openxmlformats.org/drawingml/2006/main">
               <a:ext uri="{FF2B5EF4-FFF2-40B4-BE49-F238E27FC236}">
-                <a16:creationId xmlns:a16="http://schemas.microsoft.com/office/drawing/2014/main" id="{419079B8-E635-4EAB-99BA-E43EDDEB9A27}"/>
+                <a16:creationId xmlns:a16="http://schemas.microsoft.com/office/drawing/2014/main" id="{4D4A478C-AA9E-48BA-9171-2FF588F5A06E}"/>
               </a:ext>
             </a:extLst>
           </p:cNvPr>
@@ -11085,7 +11093,7 @@
           <p:cNvPr id="4" name="">
             <a:extLst xmlns:a="http://schemas.openxmlformats.org/drawingml/2006/main">
               <a:ext uri="{FF2B5EF4-FFF2-40B4-BE49-F238E27FC236}">
-                <a16:creationId xmlns:a16="http://schemas.microsoft.com/office/drawing/2014/main" id="{19559D20-85CD-4587-B7A9-04D988A43873}"/>
+                <a16:creationId xmlns:a16="http://schemas.microsoft.com/office/drawing/2014/main" id="{CFD5C617-C659-42D2-ADE4-9772495D496E}"/>
               </a:ext>
             </a:extLst>
           </p:cNvPr>
@@ -11142,7 +11150,7 @@
           <p:cNvPr id="5" name="">
             <a:extLst xmlns:a="http://schemas.openxmlformats.org/drawingml/2006/main">
               <a:ext uri="{FF2B5EF4-FFF2-40B4-BE49-F238E27FC236}">
-                <a16:creationId xmlns:a16="http://schemas.microsoft.com/office/drawing/2014/main" id="{789B151C-1FF3-462C-8B2A-A393451AE469}"/>
+                <a16:creationId xmlns:a16="http://schemas.microsoft.com/office/drawing/2014/main" id="{7EE228CB-E0AA-473B-B068-92E920A4512C}"/>
               </a:ext>
             </a:extLst>
           </p:cNvPr>
@@ -11199,7 +11207,7 @@
           <p:cNvPr id="6" name="">
             <a:extLst xmlns:a="http://schemas.openxmlformats.org/drawingml/2006/main">
               <a:ext uri="{FF2B5EF4-FFF2-40B4-BE49-F238E27FC236}">
-                <a16:creationId xmlns:a16="http://schemas.microsoft.com/office/drawing/2014/main" id="{DDAC7D52-B07B-4B23-A595-6B4539833993}"/>
+                <a16:creationId xmlns:a16="http://schemas.microsoft.com/office/drawing/2014/main" id="{F623773F-FBB3-410F-894D-98265313F729}"/>
               </a:ext>
             </a:extLst>
           </p:cNvPr>
@@ -11256,7 +11264,7 @@
           <p:cNvPr id="7" name="">
             <a:extLst xmlns:a="http://schemas.openxmlformats.org/drawingml/2006/main">
               <a:ext uri="{FF2B5EF4-FFF2-40B4-BE49-F238E27FC236}">
-                <a16:creationId xmlns:a16="http://schemas.microsoft.com/office/drawing/2014/main" id="{7719B9D9-39D1-43C4-A8FB-D33409F9AEE7}"/>
+                <a16:creationId xmlns:a16="http://schemas.microsoft.com/office/drawing/2014/main" id="{AFEDEDA1-9126-41AB-A903-4498DFBF91EE}"/>
               </a:ext>
             </a:extLst>
           </p:cNvPr>
@@ -11288,7 +11296,7 @@
           <p:cNvPr id="8" name="">
             <a:extLst xmlns:a="http://schemas.openxmlformats.org/drawingml/2006/main">
               <a:ext uri="{FF2B5EF4-FFF2-40B4-BE49-F238E27FC236}">
-                <a16:creationId xmlns:a16="http://schemas.microsoft.com/office/drawing/2014/main" id="{6471945A-FE1C-4907-A00A-0B28DBEA5661}"/>
+                <a16:creationId xmlns:a16="http://schemas.microsoft.com/office/drawing/2014/main" id="{43F8F555-F7DC-4A04-BFE3-4EAB6288F43C}"/>
               </a:ext>
             </a:extLst>
           </p:cNvPr>
@@ -11345,7 +11353,7 @@
           <p:cNvPr id="9" name="">
             <a:extLst xmlns:a="http://schemas.openxmlformats.org/drawingml/2006/main">
               <a:ext uri="{FF2B5EF4-FFF2-40B4-BE49-F238E27FC236}">
-                <a16:creationId xmlns:a16="http://schemas.microsoft.com/office/drawing/2014/main" id="{164115DE-809E-494F-8D37-6592F82665E7}"/>
+                <a16:creationId xmlns:a16="http://schemas.microsoft.com/office/drawing/2014/main" id="{5DC37DFD-9DB3-4B8D-B131-C2A345EA5203}"/>
               </a:ext>
             </a:extLst>
           </p:cNvPr>
@@ -11406,7 +11414,7 @@
           <p:nvPr/>
         </p:nvPicPr>
         <p:blipFill>
-          <a:blip xmlns:r="http://schemas.openxmlformats.org/officeDocument/2006/relationships" xmlns:a="http://schemas.openxmlformats.org/drawingml/2006/main" r:embed="R8e5414fcc1894a0f"/>
+          <a:blip xmlns:r="http://schemas.openxmlformats.org/officeDocument/2006/relationships" xmlns:a="http://schemas.openxmlformats.org/drawingml/2006/main" r:embed="R0a34c369b34b4b0f"/>
           <a:stretch xmlns:a="http://schemas.openxmlformats.org/drawingml/2006/main"/>
         </p:blipFill>
         <p:spPr>
@@ -11424,7 +11432,7 @@
           <p:cNvPr id="11" name="">
             <a:extLst xmlns:a="http://schemas.openxmlformats.org/drawingml/2006/main">
               <a:ext uri="{FF2B5EF4-FFF2-40B4-BE49-F238E27FC236}">
-                <a16:creationId xmlns:a16="http://schemas.microsoft.com/office/drawing/2014/main" id="{C8BE299E-C8A2-4AF2-99B8-167D2001253B}"/>
+                <a16:creationId xmlns:a16="http://schemas.microsoft.com/office/drawing/2014/main" id="{E4217802-72DB-4596-9CEC-88679ABAB640}"/>
               </a:ext>
             </a:extLst>
           </p:cNvPr>
@@ -11481,7 +11489,7 @@
           <p:cNvPr id="12" name="">
             <a:extLst xmlns:a="http://schemas.openxmlformats.org/drawingml/2006/main">
               <a:ext uri="{FF2B5EF4-FFF2-40B4-BE49-F238E27FC236}">
-                <a16:creationId xmlns:a16="http://schemas.microsoft.com/office/drawing/2014/main" id="{166BFEC6-216D-4A90-821A-608874435B0C}"/>
+                <a16:creationId xmlns:a16="http://schemas.microsoft.com/office/drawing/2014/main" id="{8119B046-DC7E-420B-9D19-B8023AC26CAB}"/>
               </a:ext>
             </a:extLst>
           </p:cNvPr>
@@ -11538,7 +11546,7 @@
           <p:cNvPr id="13" name="">
             <a:extLst xmlns:a="http://schemas.openxmlformats.org/drawingml/2006/main">
               <a:ext uri="{FF2B5EF4-FFF2-40B4-BE49-F238E27FC236}">
-                <a16:creationId xmlns:a16="http://schemas.microsoft.com/office/drawing/2014/main" id="{B82D9035-C98D-4FB3-9A33-9514CA03CC49}"/>
+                <a16:creationId xmlns:a16="http://schemas.microsoft.com/office/drawing/2014/main" id="{BDDAE195-21C2-46DE-859D-6C6651310F45}"/>
               </a:ext>
             </a:extLst>
           </p:cNvPr>
@@ -11570,7 +11578,7 @@
           <p:cNvPr id="14" name="">
             <a:extLst xmlns:a="http://schemas.openxmlformats.org/drawingml/2006/main">
               <a:ext uri="{FF2B5EF4-FFF2-40B4-BE49-F238E27FC236}">
-                <a16:creationId xmlns:a16="http://schemas.microsoft.com/office/drawing/2014/main" id="{F1095F66-B33A-46F5-B992-F87A5A902F91}"/>
+                <a16:creationId xmlns:a16="http://schemas.microsoft.com/office/drawing/2014/main" id="{1C65CA9B-2AE8-4E37-A9A7-B24CC98124C2}"/>
               </a:ext>
             </a:extLst>
           </p:cNvPr>
@@ -11627,7 +11635,7 @@
           <p:cNvPr id="15" name="">
             <a:extLst xmlns:a="http://schemas.openxmlformats.org/drawingml/2006/main">
               <a:ext uri="{FF2B5EF4-FFF2-40B4-BE49-F238E27FC236}">
-                <a16:creationId xmlns:a16="http://schemas.microsoft.com/office/drawing/2014/main" id="{D57401E4-563C-4E5B-B647-8A364EAA3161}"/>
+                <a16:creationId xmlns:a16="http://schemas.microsoft.com/office/drawing/2014/main" id="{34229545-5DFD-4FD9-95E3-BEE736E63661}"/>
               </a:ext>
             </a:extLst>
           </p:cNvPr>
@@ -11682,7 +11690,7 @@
     </p:spTree>
     <p:extLst>
       <p:ext uri="{BB962C8B-B14F-4D97-AF65-F5344CB8AC3E}">
-        <p14:creationId xmlns:p14="http://schemas.microsoft.com/office/powerpoint/2010/main" val="1386194345"/>
+        <p14:creationId xmlns:p14="http://schemas.microsoft.com/office/powerpoint/2010/main" val="1237778283"/>
       </p:ext>
     </p:extLst>
   </p:cSld>
@@ -11837,7 +11845,7 @@
           <p:cNvPr id="23" name="">
             <a:extLst xmlns:a="http://schemas.openxmlformats.org/drawingml/2006/main">
               <a:ext uri="{FF2B5EF4-FFF2-40B4-BE49-F238E27FC236}">
-                <a16:creationId xmlns:a16="http://schemas.microsoft.com/office/drawing/2014/main" id="{AE5CCDE9-1416-43A1-979C-97084FB059CF}"/>
+                <a16:creationId xmlns:a16="http://schemas.microsoft.com/office/drawing/2014/main" id="{7D1AE417-4400-4825-84FC-71BF164765A8}"/>
               </a:ext>
             </a:extLst>
           </p:cNvPr>
@@ -11869,7 +11877,7 @@
           <p:cNvPr id="2" name="">
             <a:extLst xmlns:a="http://schemas.openxmlformats.org/drawingml/2006/main">
               <a:ext uri="{FF2B5EF4-FFF2-40B4-BE49-F238E27FC236}">
-                <a16:creationId xmlns:a16="http://schemas.microsoft.com/office/drawing/2014/main" id="{E3721579-6833-4BD0-A45C-8ADB8F766F3B}"/>
+                <a16:creationId xmlns:a16="http://schemas.microsoft.com/office/drawing/2014/main" id="{4620A841-3807-417B-9851-627F70643320}"/>
               </a:ext>
             </a:extLst>
           </p:cNvPr>
@@ -11926,7 +11934,7 @@
           <p:cNvPr id="3" name="">
             <a:extLst xmlns:a="http://schemas.openxmlformats.org/drawingml/2006/main">
               <a:ext uri="{FF2B5EF4-FFF2-40B4-BE49-F238E27FC236}">
-                <a16:creationId xmlns:a16="http://schemas.microsoft.com/office/drawing/2014/main" id="{41E9D2AC-5877-4892-A3D5-D8DE3D5EEAF3}"/>
+                <a16:creationId xmlns:a16="http://schemas.microsoft.com/office/drawing/2014/main" id="{D514C5BE-F079-4DD5-B3C4-A484E3388E5F}"/>
               </a:ext>
             </a:extLst>
           </p:cNvPr>
@@ -11958,7 +11966,7 @@
           <p:cNvPr id="4" name="">
             <a:extLst xmlns:a="http://schemas.openxmlformats.org/drawingml/2006/main">
               <a:ext uri="{FF2B5EF4-FFF2-40B4-BE49-F238E27FC236}">
-                <a16:creationId xmlns:a16="http://schemas.microsoft.com/office/drawing/2014/main" id="{F5165D8D-13B7-4124-947A-92AFE696CA18}"/>
+                <a16:creationId xmlns:a16="http://schemas.microsoft.com/office/drawing/2014/main" id="{AD96261D-3A04-49BB-B733-7A5FD1D61C46}"/>
               </a:ext>
             </a:extLst>
           </p:cNvPr>
@@ -12015,7 +12023,7 @@
           <p:cNvPr id="5" name="">
             <a:extLst xmlns:a="http://schemas.openxmlformats.org/drawingml/2006/main">
               <a:ext uri="{FF2B5EF4-FFF2-40B4-BE49-F238E27FC236}">
-                <a16:creationId xmlns:a16="http://schemas.microsoft.com/office/drawing/2014/main" id="{DAA10B68-3020-4CCB-AD4B-30F7CB407343}"/>
+                <a16:creationId xmlns:a16="http://schemas.microsoft.com/office/drawing/2014/main" id="{35F30193-8747-4C86-ABF1-98AE72CC8EFE}"/>
               </a:ext>
             </a:extLst>
           </p:cNvPr>
@@ -12072,7 +12080,7 @@
           <p:cNvPr id="6" name="">
             <a:extLst xmlns:a="http://schemas.openxmlformats.org/drawingml/2006/main">
               <a:ext uri="{FF2B5EF4-FFF2-40B4-BE49-F238E27FC236}">
-                <a16:creationId xmlns:a16="http://schemas.microsoft.com/office/drawing/2014/main" id="{BF0AA2C2-D42B-437D-BD29-587F91E2BE16}"/>
+                <a16:creationId xmlns:a16="http://schemas.microsoft.com/office/drawing/2014/main" id="{D74EA467-538B-4D2F-9C96-90F43B1E00CB}"/>
               </a:ext>
             </a:extLst>
           </p:cNvPr>
@@ -12129,7 +12137,7 @@
           <p:cNvPr id="7" name="">
             <a:extLst xmlns:a="http://schemas.openxmlformats.org/drawingml/2006/main">
               <a:ext uri="{FF2B5EF4-FFF2-40B4-BE49-F238E27FC236}">
-                <a16:creationId xmlns:a16="http://schemas.microsoft.com/office/drawing/2014/main" id="{02E7481F-7B5D-4126-BF0C-E7AB5ECCED2D}"/>
+                <a16:creationId xmlns:a16="http://schemas.microsoft.com/office/drawing/2014/main" id="{BC07D23A-5624-445C-9553-703185C801EF}"/>
               </a:ext>
             </a:extLst>
           </p:cNvPr>
@@ -12161,7 +12169,7 @@
           <p:cNvPr id="8" name="">
             <a:extLst xmlns:a="http://schemas.openxmlformats.org/drawingml/2006/main">
               <a:ext uri="{FF2B5EF4-FFF2-40B4-BE49-F238E27FC236}">
-                <a16:creationId xmlns:a16="http://schemas.microsoft.com/office/drawing/2014/main" id="{074E0809-153E-43F6-89E8-90B8ED6016BD}"/>
+                <a16:creationId xmlns:a16="http://schemas.microsoft.com/office/drawing/2014/main" id="{1A433306-ACC2-4E7E-9F98-2BEB490D9307}"/>
               </a:ext>
             </a:extLst>
           </p:cNvPr>
@@ -12218,7 +12226,7 @@
           <p:cNvPr id="9" name="">
             <a:extLst xmlns:a="http://schemas.openxmlformats.org/drawingml/2006/main">
               <a:ext uri="{FF2B5EF4-FFF2-40B4-BE49-F238E27FC236}">
-                <a16:creationId xmlns:a16="http://schemas.microsoft.com/office/drawing/2014/main" id="{8B9FAD40-028C-4AB7-BB23-18DCF5337078}"/>
+                <a16:creationId xmlns:a16="http://schemas.microsoft.com/office/drawing/2014/main" id="{9A2C718A-6349-4927-82E5-77589B5F68B8}"/>
               </a:ext>
             </a:extLst>
           </p:cNvPr>
@@ -12275,7 +12283,7 @@
           <p:cNvPr id="10" name="">
             <a:extLst xmlns:a="http://schemas.openxmlformats.org/drawingml/2006/main">
               <a:ext uri="{FF2B5EF4-FFF2-40B4-BE49-F238E27FC236}">
-                <a16:creationId xmlns:a16="http://schemas.microsoft.com/office/drawing/2014/main" id="{09C32FC6-D49D-4E85-B236-DB3F18941E61}"/>
+                <a16:creationId xmlns:a16="http://schemas.microsoft.com/office/drawing/2014/main" id="{B2D05B2F-574B-4C38-B52A-59D16B161EFF}"/>
               </a:ext>
             </a:extLst>
           </p:cNvPr>
@@ -12309,7 +12317,7 @@
           <p:cNvPr id="11" name="">
             <a:extLst xmlns:a="http://schemas.openxmlformats.org/drawingml/2006/main">
               <a:ext uri="{FF2B5EF4-FFF2-40B4-BE49-F238E27FC236}">
-                <a16:creationId xmlns:a16="http://schemas.microsoft.com/office/drawing/2014/main" id="{A5503211-8AFF-4C65-B6C6-CDD60E625692}"/>
+                <a16:creationId xmlns:a16="http://schemas.microsoft.com/office/drawing/2014/main" id="{187CF31C-CA89-41F6-8E01-7F511E008D65}"/>
               </a:ext>
             </a:extLst>
           </p:cNvPr>
@@ -12341,7 +12349,7 @@
           <p:cNvPr id="12" name="">
             <a:extLst xmlns:a="http://schemas.openxmlformats.org/drawingml/2006/main">
               <a:ext uri="{FF2B5EF4-FFF2-40B4-BE49-F238E27FC236}">
-                <a16:creationId xmlns:a16="http://schemas.microsoft.com/office/drawing/2014/main" id="{679B7086-71EB-41B7-B225-7778574BF71D}"/>
+                <a16:creationId xmlns:a16="http://schemas.microsoft.com/office/drawing/2014/main" id="{0CE4694D-DEB1-415E-A44B-50F6633CC95A}"/>
               </a:ext>
             </a:extLst>
           </p:cNvPr>
@@ -12398,7 +12406,7 @@
           <p:cNvPr id="13" name="">
             <a:extLst xmlns:a="http://schemas.openxmlformats.org/drawingml/2006/main">
               <a:ext uri="{FF2B5EF4-FFF2-40B4-BE49-F238E27FC236}">
-                <a16:creationId xmlns:a16="http://schemas.microsoft.com/office/drawing/2014/main" id="{EB5599C0-ABDC-458B-B271-37CE18B56DF9}"/>
+                <a16:creationId xmlns:a16="http://schemas.microsoft.com/office/drawing/2014/main" id="{98B2DDA0-6D65-497A-943A-9B0AA55E2DDE}"/>
               </a:ext>
             </a:extLst>
           </p:cNvPr>
@@ -12455,7 +12463,7 @@
           <p:cNvPr id="14" name="">
             <a:extLst xmlns:a="http://schemas.openxmlformats.org/drawingml/2006/main">
               <a:ext uri="{FF2B5EF4-FFF2-40B4-BE49-F238E27FC236}">
-                <a16:creationId xmlns:a16="http://schemas.microsoft.com/office/drawing/2014/main" id="{F827CF10-F977-4D3C-A8F0-C6C258DDF451}"/>
+                <a16:creationId xmlns:a16="http://schemas.microsoft.com/office/drawing/2014/main" id="{25BDECFD-8524-4DE6-AEBB-8EE3DACF448B}"/>
               </a:ext>
             </a:extLst>
           </p:cNvPr>
@@ -12489,7 +12497,7 @@
           <p:cNvPr id="15" name="">
             <a:extLst xmlns:a="http://schemas.openxmlformats.org/drawingml/2006/main">
               <a:ext uri="{FF2B5EF4-FFF2-40B4-BE49-F238E27FC236}">
-                <a16:creationId xmlns:a16="http://schemas.microsoft.com/office/drawing/2014/main" id="{B7E9FCB6-FFE9-480C-82DE-39F113430C62}"/>
+                <a16:creationId xmlns:a16="http://schemas.microsoft.com/office/drawing/2014/main" id="{44431683-F892-4E3E-989E-52AEDCFEB3A6}"/>
               </a:ext>
             </a:extLst>
           </p:cNvPr>
@@ -12521,7 +12529,7 @@
           <p:cNvPr id="16" name="">
             <a:extLst xmlns:a="http://schemas.openxmlformats.org/drawingml/2006/main">
               <a:ext uri="{FF2B5EF4-FFF2-40B4-BE49-F238E27FC236}">
-                <a16:creationId xmlns:a16="http://schemas.microsoft.com/office/drawing/2014/main" id="{968C4329-5DB4-4862-9249-89CBFB1E1E08}"/>
+                <a16:creationId xmlns:a16="http://schemas.microsoft.com/office/drawing/2014/main" id="{46E55AD1-9E5E-4253-AF3B-87554A70FC8B}"/>
               </a:ext>
             </a:extLst>
           </p:cNvPr>
@@ -12578,7 +12586,7 @@
           <p:cNvPr id="17" name="">
             <a:extLst xmlns:a="http://schemas.openxmlformats.org/drawingml/2006/main">
               <a:ext uri="{FF2B5EF4-FFF2-40B4-BE49-F238E27FC236}">
-                <a16:creationId xmlns:a16="http://schemas.microsoft.com/office/drawing/2014/main" id="{E8918B9C-27CE-4B4F-95A4-41D5A7FB16F3}"/>
+                <a16:creationId xmlns:a16="http://schemas.microsoft.com/office/drawing/2014/main" id="{27B3DC01-D574-4055-B3E5-1A4BCFEFB7AA}"/>
               </a:ext>
             </a:extLst>
           </p:cNvPr>
@@ -12635,7 +12643,7 @@
           <p:cNvPr id="18" name="">
             <a:extLst xmlns:a="http://schemas.openxmlformats.org/drawingml/2006/main">
               <a:ext uri="{FF2B5EF4-FFF2-40B4-BE49-F238E27FC236}">
-                <a16:creationId xmlns:a16="http://schemas.microsoft.com/office/drawing/2014/main" id="{0C33515E-0B46-446B-B012-7350CE2FFD94}"/>
+                <a16:creationId xmlns:a16="http://schemas.microsoft.com/office/drawing/2014/main" id="{CB989764-AD71-45D6-8EE1-BC08076AD149}"/>
               </a:ext>
             </a:extLst>
           </p:cNvPr>
@@ -12669,7 +12677,7 @@
           <p:cNvPr id="19" name="">
             <a:extLst xmlns:a="http://schemas.openxmlformats.org/drawingml/2006/main">
               <a:ext uri="{FF2B5EF4-FFF2-40B4-BE49-F238E27FC236}">
-                <a16:creationId xmlns:a16="http://schemas.microsoft.com/office/drawing/2014/main" id="{BB40B20D-418D-4958-87EA-C019488EED6F}"/>
+                <a16:creationId xmlns:a16="http://schemas.microsoft.com/office/drawing/2014/main" id="{B2E10CA8-7D6D-44E6-8851-63FA61193C9C}"/>
               </a:ext>
             </a:extLst>
           </p:cNvPr>
@@ -12701,7 +12709,7 @@
           <p:cNvPr id="20" name="">
             <a:extLst xmlns:a="http://schemas.openxmlformats.org/drawingml/2006/main">
               <a:ext uri="{FF2B5EF4-FFF2-40B4-BE49-F238E27FC236}">
-                <a16:creationId xmlns:a16="http://schemas.microsoft.com/office/drawing/2014/main" id="{CBF9A657-DA66-48F3-9DE6-3BA7790F593A}"/>
+                <a16:creationId xmlns:a16="http://schemas.microsoft.com/office/drawing/2014/main" id="{F1BA79BC-8121-416C-BE3D-B57C78CD36CE}"/>
               </a:ext>
             </a:extLst>
           </p:cNvPr>
@@ -12758,7 +12766,7 @@
           <p:cNvPr id="21" name="">
             <a:extLst xmlns:a="http://schemas.openxmlformats.org/drawingml/2006/main">
               <a:ext uri="{FF2B5EF4-FFF2-40B4-BE49-F238E27FC236}">
-                <a16:creationId xmlns:a16="http://schemas.microsoft.com/office/drawing/2014/main" id="{CB63282C-7BEE-42E5-9966-ADBEE5FD9677}"/>
+                <a16:creationId xmlns:a16="http://schemas.microsoft.com/office/drawing/2014/main" id="{7AAA2AA9-0EFE-4543-A260-8856BD133CCF}"/>
               </a:ext>
             </a:extLst>
           </p:cNvPr>
@@ -12815,7 +12823,7 @@
           <p:cNvPr id="22" name="">
             <a:extLst xmlns:a="http://schemas.openxmlformats.org/drawingml/2006/main">
               <a:ext uri="{FF2B5EF4-FFF2-40B4-BE49-F238E27FC236}">
-                <a16:creationId xmlns:a16="http://schemas.microsoft.com/office/drawing/2014/main" id="{4CCEAEA8-E8A8-45D8-96BC-7A0B05FDC381}"/>
+                <a16:creationId xmlns:a16="http://schemas.microsoft.com/office/drawing/2014/main" id="{FFED424E-2168-4F89-9F57-D7F00BDD045A}"/>
               </a:ext>
             </a:extLst>
           </p:cNvPr>
@@ -12870,7 +12878,7 @@
     </p:spTree>
     <p:extLst>
       <p:ext uri="{BB962C8B-B14F-4D97-AF65-F5344CB8AC3E}">
-        <p14:creationId xmlns:p14="http://schemas.microsoft.com/office/powerpoint/2010/main" val="1036398109"/>
+        <p14:creationId xmlns:p14="http://schemas.microsoft.com/office/powerpoint/2010/main" val="1410355961"/>
       </p:ext>
     </p:extLst>
   </p:cSld>
@@ -13071,7 +13079,7 @@
           <p:cNvPr id="22" name="">
             <a:extLst xmlns:a="http://schemas.openxmlformats.org/drawingml/2006/main">
               <a:ext uri="{FF2B5EF4-FFF2-40B4-BE49-F238E27FC236}">
-                <a16:creationId xmlns:a16="http://schemas.microsoft.com/office/drawing/2014/main" id="{3F4966C8-9DB3-4B8F-A626-CDDE9EE0F806}"/>
+                <a16:creationId xmlns:a16="http://schemas.microsoft.com/office/drawing/2014/main" id="{FAF9FF9E-CEEA-4B4C-B93F-07555AFDD8D8}"/>
               </a:ext>
             </a:extLst>
           </p:cNvPr>
@@ -13103,7 +13111,7 @@
           <p:cNvPr id="2" name="">
             <a:extLst xmlns:a="http://schemas.openxmlformats.org/drawingml/2006/main">
               <a:ext uri="{FF2B5EF4-FFF2-40B4-BE49-F238E27FC236}">
-                <a16:creationId xmlns:a16="http://schemas.microsoft.com/office/drawing/2014/main" id="{950C7178-063A-4474-B0AC-7B26C580039D}"/>
+                <a16:creationId xmlns:a16="http://schemas.microsoft.com/office/drawing/2014/main" id="{CB63D870-AF2E-4091-AB5E-15A4C9E85EB7}"/>
               </a:ext>
             </a:extLst>
           </p:cNvPr>
@@ -13160,7 +13168,7 @@
           <p:cNvPr id="3" name="">
             <a:extLst xmlns:a="http://schemas.openxmlformats.org/drawingml/2006/main">
               <a:ext uri="{FF2B5EF4-FFF2-40B4-BE49-F238E27FC236}">
-                <a16:creationId xmlns:a16="http://schemas.microsoft.com/office/drawing/2014/main" id="{4B8773FC-C531-4838-8264-90E65A94CDBA}"/>
+                <a16:creationId xmlns:a16="http://schemas.microsoft.com/office/drawing/2014/main" id="{6E139CD9-4D5C-40CE-A1C4-6E1D26D757AF}"/>
               </a:ext>
             </a:extLst>
           </p:cNvPr>
@@ -13192,7 +13200,7 @@
           <p:cNvPr id="4" name="">
             <a:extLst xmlns:a="http://schemas.openxmlformats.org/drawingml/2006/main">
               <a:ext uri="{FF2B5EF4-FFF2-40B4-BE49-F238E27FC236}">
-                <a16:creationId xmlns:a16="http://schemas.microsoft.com/office/drawing/2014/main" id="{E8C49CD1-6B27-4B23-8676-1D28C9CC9B16}"/>
+                <a16:creationId xmlns:a16="http://schemas.microsoft.com/office/drawing/2014/main" id="{E34E846F-F848-48FF-934D-620054B5E8F2}"/>
               </a:ext>
             </a:extLst>
           </p:cNvPr>
@@ -13249,7 +13257,7 @@
           <p:cNvPr id="5" name="">
             <a:extLst xmlns:a="http://schemas.openxmlformats.org/drawingml/2006/main">
               <a:ext uri="{FF2B5EF4-FFF2-40B4-BE49-F238E27FC236}">
-                <a16:creationId xmlns:a16="http://schemas.microsoft.com/office/drawing/2014/main" id="{20038918-2F8E-44A8-A0CB-324E8196039C}"/>
+                <a16:creationId xmlns:a16="http://schemas.microsoft.com/office/drawing/2014/main" id="{199D9E52-8CEA-442B-9A62-B5F67E3D11FB}"/>
               </a:ext>
             </a:extLst>
           </p:cNvPr>
@@ -13306,7 +13314,7 @@
           <p:cNvPr id="6" name="">
             <a:extLst xmlns:a="http://schemas.openxmlformats.org/drawingml/2006/main">
               <a:ext uri="{FF2B5EF4-FFF2-40B4-BE49-F238E27FC236}">
-                <a16:creationId xmlns:a16="http://schemas.microsoft.com/office/drawing/2014/main" id="{58692071-D180-4771-8C9E-99863CAE61F5}"/>
+                <a16:creationId xmlns:a16="http://schemas.microsoft.com/office/drawing/2014/main" id="{54724A50-A160-4AF2-B594-26ED12F224F9}"/>
               </a:ext>
             </a:extLst>
           </p:cNvPr>
@@ -13363,7 +13371,7 @@
           <p:cNvPr id="7" name="">
             <a:extLst xmlns:a="http://schemas.openxmlformats.org/drawingml/2006/main">
               <a:ext uri="{FF2B5EF4-FFF2-40B4-BE49-F238E27FC236}">
-                <a16:creationId xmlns:a16="http://schemas.microsoft.com/office/drawing/2014/main" id="{E5E3231C-4291-4B1C-8FD4-EEB4F85ECFA9}"/>
+                <a16:creationId xmlns:a16="http://schemas.microsoft.com/office/drawing/2014/main" id="{ECCBF711-DD77-4C7A-86F4-1ED7C8E987B6}"/>
               </a:ext>
             </a:extLst>
           </p:cNvPr>
@@ -13395,7 +13403,7 @@
           <p:cNvPr id="8" name="">
             <a:extLst xmlns:a="http://schemas.openxmlformats.org/drawingml/2006/main">
               <a:ext uri="{FF2B5EF4-FFF2-40B4-BE49-F238E27FC236}">
-                <a16:creationId xmlns:a16="http://schemas.microsoft.com/office/drawing/2014/main" id="{050B28FC-B104-4087-AA65-6B0A28171039}"/>
+                <a16:creationId xmlns:a16="http://schemas.microsoft.com/office/drawing/2014/main" id="{D083C638-1E7D-44C5-8AAD-BED8D75AA433}"/>
               </a:ext>
             </a:extLst>
           </p:cNvPr>
@@ -13452,7 +13460,7 @@
           <p:cNvPr id="9" name="">
             <a:extLst xmlns:a="http://schemas.openxmlformats.org/drawingml/2006/main">
               <a:ext uri="{FF2B5EF4-FFF2-40B4-BE49-F238E27FC236}">
-                <a16:creationId xmlns:a16="http://schemas.microsoft.com/office/drawing/2014/main" id="{E88E1BB7-13C5-4E3C-BDB2-FA73823A85EC}"/>
+                <a16:creationId xmlns:a16="http://schemas.microsoft.com/office/drawing/2014/main" id="{8F309605-6B40-4B8A-99BA-B09D98AE6B87}"/>
               </a:ext>
             </a:extLst>
           </p:cNvPr>
@@ -13509,7 +13517,7 @@
           <p:cNvPr id="10" name="">
             <a:extLst xmlns:a="http://schemas.openxmlformats.org/drawingml/2006/main">
               <a:ext uri="{FF2B5EF4-FFF2-40B4-BE49-F238E27FC236}">
-                <a16:creationId xmlns:a16="http://schemas.microsoft.com/office/drawing/2014/main" id="{F9CB65F2-460E-4035-8C9C-B27DAC8AC97F}"/>
+                <a16:creationId xmlns:a16="http://schemas.microsoft.com/office/drawing/2014/main" id="{4AA9BE28-D96D-4F80-9FB7-F819C0A97A23}"/>
               </a:ext>
             </a:extLst>
           </p:cNvPr>
@@ -13543,7 +13551,7 @@
           <p:cNvPr id="11" name="">
             <a:extLst xmlns:a="http://schemas.openxmlformats.org/drawingml/2006/main">
               <a:ext uri="{FF2B5EF4-FFF2-40B4-BE49-F238E27FC236}">
-                <a16:creationId xmlns:a16="http://schemas.microsoft.com/office/drawing/2014/main" id="{3E95D75E-2EAB-476B-8B03-C8602433653A}"/>
+                <a16:creationId xmlns:a16="http://schemas.microsoft.com/office/drawing/2014/main" id="{4A6FBA5A-1B33-4121-9474-5FE8947B474A}"/>
               </a:ext>
             </a:extLst>
           </p:cNvPr>
@@ -13575,7 +13583,7 @@
           <p:cNvPr id="12" name="">
             <a:extLst xmlns:a="http://schemas.openxmlformats.org/drawingml/2006/main">
               <a:ext uri="{FF2B5EF4-FFF2-40B4-BE49-F238E27FC236}">
-                <a16:creationId xmlns:a16="http://schemas.microsoft.com/office/drawing/2014/main" id="{E2EB7E88-3CD6-4CC6-979F-DFA42BBFA08B}"/>
+                <a16:creationId xmlns:a16="http://schemas.microsoft.com/office/drawing/2014/main" id="{B3F75D5A-D8DE-430C-AF6B-E08A0BC25957}"/>
               </a:ext>
             </a:extLst>
           </p:cNvPr>
@@ -13632,7 +13640,7 @@
           <p:cNvPr id="13" name="">
             <a:extLst xmlns:a="http://schemas.openxmlformats.org/drawingml/2006/main">
               <a:ext uri="{FF2B5EF4-FFF2-40B4-BE49-F238E27FC236}">
-                <a16:creationId xmlns:a16="http://schemas.microsoft.com/office/drawing/2014/main" id="{940031EA-7B72-4306-9E43-B855D365D7F9}"/>
+                <a16:creationId xmlns:a16="http://schemas.microsoft.com/office/drawing/2014/main" id="{8937AD66-0CA6-4BCD-812B-1D4886D03D6D}"/>
               </a:ext>
             </a:extLst>
           </p:cNvPr>
@@ -13689,7 +13697,7 @@
           <p:cNvPr id="14" name="">
             <a:extLst xmlns:a="http://schemas.openxmlformats.org/drawingml/2006/main">
               <a:ext uri="{FF2B5EF4-FFF2-40B4-BE49-F238E27FC236}">
-                <a16:creationId xmlns:a16="http://schemas.microsoft.com/office/drawing/2014/main" id="{E3822E71-1562-449A-8E69-C42588F9E125}"/>
+                <a16:creationId xmlns:a16="http://schemas.microsoft.com/office/drawing/2014/main" id="{2A4E97A3-4FB6-467F-8CD6-E9FD1C9801A0}"/>
               </a:ext>
             </a:extLst>
           </p:cNvPr>
@@ -13723,7 +13731,7 @@
           <p:cNvPr id="15" name="">
             <a:extLst xmlns:a="http://schemas.openxmlformats.org/drawingml/2006/main">
               <a:ext uri="{FF2B5EF4-FFF2-40B4-BE49-F238E27FC236}">
-                <a16:creationId xmlns:a16="http://schemas.microsoft.com/office/drawing/2014/main" id="{70A3B0F2-5773-4D80-97E2-63BEB8362DCA}"/>
+                <a16:creationId xmlns:a16="http://schemas.microsoft.com/office/drawing/2014/main" id="{6DC1AD3C-70CF-4AC4-B1CB-413BB8548E3E}"/>
               </a:ext>
             </a:extLst>
           </p:cNvPr>
@@ -13755,7 +13763,7 @@
           <p:cNvPr id="16" name="">
             <a:extLst xmlns:a="http://schemas.openxmlformats.org/drawingml/2006/main">
               <a:ext uri="{FF2B5EF4-FFF2-40B4-BE49-F238E27FC236}">
-                <a16:creationId xmlns:a16="http://schemas.microsoft.com/office/drawing/2014/main" id="{F409B172-6B72-4D3F-BD63-751B514378AF}"/>
+                <a16:creationId xmlns:a16="http://schemas.microsoft.com/office/drawing/2014/main" id="{61EF1D55-1AA0-41F9-97FB-C16B4BE36985}"/>
               </a:ext>
             </a:extLst>
           </p:cNvPr>
@@ -13812,7 +13820,7 @@
           <p:cNvPr id="17" name="">
             <a:extLst xmlns:a="http://schemas.openxmlformats.org/drawingml/2006/main">
               <a:ext uri="{FF2B5EF4-FFF2-40B4-BE49-F238E27FC236}">
-                <a16:creationId xmlns:a16="http://schemas.microsoft.com/office/drawing/2014/main" id="{6AC31B12-DCB6-4B5D-9EFB-4C3241A3D4D9}"/>
+                <a16:creationId xmlns:a16="http://schemas.microsoft.com/office/drawing/2014/main" id="{7FD2BC34-CA53-4654-9555-639B4ED08249}"/>
               </a:ext>
             </a:extLst>
           </p:cNvPr>
@@ -13869,7 +13877,7 @@
           <p:cNvPr id="18" name="">
             <a:extLst xmlns:a="http://schemas.openxmlformats.org/drawingml/2006/main">
               <a:ext uri="{FF2B5EF4-FFF2-40B4-BE49-F238E27FC236}">
-                <a16:creationId xmlns:a16="http://schemas.microsoft.com/office/drawing/2014/main" id="{B19DCA1B-8563-4127-B2E6-C66D050A925F}"/>
+                <a16:creationId xmlns:a16="http://schemas.microsoft.com/office/drawing/2014/main" id="{50B69391-D961-45AC-8353-31B845ADE46E}"/>
               </a:ext>
             </a:extLst>
           </p:cNvPr>
@@ -13903,7 +13911,7 @@
           <p:cNvPr id="19" name="">
             <a:extLst xmlns:a="http://schemas.openxmlformats.org/drawingml/2006/main">
               <a:ext uri="{FF2B5EF4-FFF2-40B4-BE49-F238E27FC236}">
-                <a16:creationId xmlns:a16="http://schemas.microsoft.com/office/drawing/2014/main" id="{2204D0B1-6B5C-497E-9C82-8FD51A796E35}"/>
+                <a16:creationId xmlns:a16="http://schemas.microsoft.com/office/drawing/2014/main" id="{A2C9F537-9C43-4A00-A639-0D013282AD4E}"/>
               </a:ext>
             </a:extLst>
           </p:cNvPr>
@@ -13935,7 +13943,7 @@
           <p:cNvPr id="20" name="">
             <a:extLst xmlns:a="http://schemas.openxmlformats.org/drawingml/2006/main">
               <a:ext uri="{FF2B5EF4-FFF2-40B4-BE49-F238E27FC236}">
-                <a16:creationId xmlns:a16="http://schemas.microsoft.com/office/drawing/2014/main" id="{D5D2733B-83B7-4C0E-BB75-B2787CF72424}"/>
+                <a16:creationId xmlns:a16="http://schemas.microsoft.com/office/drawing/2014/main" id="{27393667-2665-46D0-B39E-4ABA1086EF7D}"/>
               </a:ext>
             </a:extLst>
           </p:cNvPr>
@@ -13992,7 +14000,7 @@
           <p:cNvPr id="21" name="">
             <a:extLst xmlns:a="http://schemas.openxmlformats.org/drawingml/2006/main">
               <a:ext uri="{FF2B5EF4-FFF2-40B4-BE49-F238E27FC236}">
-                <a16:creationId xmlns:a16="http://schemas.microsoft.com/office/drawing/2014/main" id="{689292B0-294C-433C-89EF-B73591035878}"/>
+                <a16:creationId xmlns:a16="http://schemas.microsoft.com/office/drawing/2014/main" id="{EB3EBAEC-97DB-45AE-8AAF-BDC335B3ABC4}"/>
               </a:ext>
             </a:extLst>
           </p:cNvPr>
@@ -14047,7 +14055,7 @@
     </p:spTree>
     <p:extLst>
       <p:ext uri="{BB962C8B-B14F-4D97-AF65-F5344CB8AC3E}">
-        <p14:creationId xmlns:p14="http://schemas.microsoft.com/office/powerpoint/2010/main" val="1496582252"/>
+        <p14:creationId xmlns:p14="http://schemas.microsoft.com/office/powerpoint/2010/main" val="1478749323"/>
       </p:ext>
     </p:extLst>
   </p:cSld>
